--- a/curso/pptx/S83.pptx
+++ b/curso/pptx/S83.pptx
@@ -4799,7 +4799,7 @@
                 </a:solidFill>
                 <a:latin typeface="Nunito Sans"/>
               </a:rPr>
-              <a:t>En el vestuario, alguien le grita «¡Qué gay eres!» a Aitor por fallar un pase. Luego dice que solo era una broma.</a:t>
+              <a:t>En el vestuario, alguien le grita «¡Qué gay eres!» a un chico por fallar un pase. Luego dice que solo era una broma.</a:t>
             </a:r>
           </a:p>
         </p:txBody>
@@ -4872,7 +4872,7 @@
                 </a:solidFill>
                 <a:latin typeface="Nunito Sans"/>
               </a:rPr>
-              <a:t>¿A quién hace daño? A Aitor y a cualquier persona gay que lo oiga, aunque calle.</a:t>
+              <a:t>¿A quién hace daño? A ese chico y a cualquier persona gay que lo oiga, aunque calle.</a:t>
             </a:r>
           </a:p>
           <a:p>
@@ -5108,7 +5108,7 @@
                 </a:solidFill>
                 <a:latin typeface="Nunito Sans"/>
               </a:rPr>
-              <a:t>Kevin ve un vídeo de un cantante con las uñas pintadas y comenta: «Se nota que es gay».</a:t>
+              <a:t>Un chico ve un vídeo de un cantante con las uñas pintadas y comenta: «Se nota que es gay».</a:t>
             </a:r>
           </a:p>
         </p:txBody>
@@ -8200,7 +8200,7 @@
                 </a:solidFill>
                 <a:latin typeface="Nunito Sans"/>
               </a:rPr>
-              <a:t>Naiara le envió una foto privada a Iker cuando salían juntos. Ahora lo han dejado e Iker quiere reenviarla al grupo de la cuadrilla.</a:t>
+              <a:t>Una chica le envió una foto privada a un chico cuando salían juntos. Ahora lo han dejado y él quiere reenviarla al grupo de la cuadrilla.</a:t>
             </a:r>
           </a:p>
         </p:txBody>
@@ -8248,7 +8248,7 @@
                 </a:solidFill>
                 <a:latin typeface="Nunito Sans"/>
               </a:rPr>
-              <a:t>¿Naiara dio permiso para que la vieran otros? No: la envió solo a Iker.</a:t>
+              <a:t>¿Dio ella permiso para que la vieran otros? No: la envió solo a él.</a:t>
             </a:r>
           </a:p>
           <a:p>
@@ -8341,7 +8341,7 @@
                 </a:solidFill>
                 <a:latin typeface="Nunito Sans"/>
               </a:rPr>
-              <a:t>Conclusión: sin un sí claro de Naiara, no se reenvía. Y ella puede cambiar de opinión.</a:t>
+              <a:t>Conclusión: sin un sí claro de ella, no se reenvía. Y ella puede cambiar de opinión.</a:t>
             </a:r>
           </a:p>
         </p:txBody>

--- a/curso/pptx/S83.pptx
+++ b/curso/pptx/S83.pptx
@@ -23,6 +23,7 @@
     <p:sldId id="271" r:id="rId23"/>
     <p:sldId id="272" r:id="rId24"/>
     <p:sldId id="273" r:id="rId25"/>
+    <p:sldId id="274" r:id="rId26"/>
   </p:sldIdLst>
   <p:sldSz cx="12192000" cy="6858000" type="screen4x3"/>
   <p:notesSz cx="6858000" cy="9144000"/>
@@ -3536,7 +3537,7 @@
                 </a:solidFill>
                 <a:latin typeface="Nunito Sans"/>
               </a:rPr>
-              <a:t>PENSAMIENTO CRÍTICO · SESIÓN 83 · UNIDAD 18 · DIFERENTES, PERO IGUALES</a:t>
+              <a:t>PENSAMIENTO CRÍTICO · SESIÓN 83 · UNIDAD 18 · GLOCAL: CULTURAS Y MIGRACIONES</a:t>
             </a:r>
           </a:p>
         </p:txBody>
@@ -3575,7 +3576,7 @@
                 </a:solidFill>
                 <a:latin typeface="Fredoka"/>
               </a:rPr>
-              <a:t>Diversidad y respeto</a:t>
+              <a:t>Aporofobia, racismo y otras exclusiones</a:t>
             </a:r>
           </a:p>
         </p:txBody>
@@ -3614,7 +3615,7 @@
                 </a:solidFill>
                 <a:latin typeface="Nunito Sans"/>
               </a:rPr>
-              <a:t>Las personas son diversas en su orientación y su identidad; respetar es no burlarse ni excluir, y en las relaciones solo sí es sí.</a:t>
+              <a:t>Un prejuicio es juzgar a alguien por su grupo antes de conocerle; así nacen la aporofobia, el racismo y otras formas de exclusión.</a:t>
             </a:r>
           </a:p>
         </p:txBody>
@@ -3718,7 +3719,7 @@
                 </a:solidFill>
                 <a:latin typeface="Fredoka"/>
               </a:rPr>
-              <a:t>Respeto frente a burla</a:t>
+              <a:t>Casos resueltos</a:t>
             </a:r>
           </a:p>
         </p:txBody>
@@ -3783,7 +3784,7 @@
                 </a:solidFill>
                 <a:latin typeface="Nunito Sans"/>
               </a:rPr>
-              <a:t>BLOQUE 2 · RESPETO FRENTE A BURLA</a:t>
+              <a:t>BLOQUE 2 · CASOS RESUELTOS</a:t>
             </a:r>
           </a:p>
         </p:txBody>
@@ -3822,7 +3823,7 @@
                 </a:solidFill>
                 <a:latin typeface="Fredoka"/>
               </a:rPr>
-              <a:t>LGTBIfobia</a:t>
+              <a:t>Caso 1 · Turistas y sin hogar</a:t>
             </a:r>
           </a:p>
         </p:txBody>
@@ -3835,14 +3836,14 @@
         </p:nvSpPr>
         <p:spPr>
           <a:xfrm>
-            <a:off x="640000" y="1650000"/>
-            <a:ext cx="10912000" cy="1150000"/>
+            <a:off x="640000" y="1600000"/>
+            <a:ext cx="10912000" cy="1100000"/>
           </a:xfrm>
           <a:prstGeom prst="rect">
             <a:avLst/>
           </a:prstGeom>
           <a:solidFill>
-            <a:srgbClr val="EAF0F7"/>
+            <a:srgbClr val="FFFFFF"/>
           </a:solidFill>
           <a:ln>
             <a:noFill/>
@@ -3878,7 +3879,7 @@
         </p:nvSpPr>
         <p:spPr>
           <a:xfrm>
-            <a:off x="840000" y="1730000"/>
+            <a:off x="840000" y="1650000"/>
             <a:ext cx="10512000" cy="1000000"/>
           </a:xfrm>
           <a:prstGeom prst="rect">
@@ -3894,17 +3895,17 @@
           <a:p>
             <a:pPr>
               <a:spcAft>
-                <a:spcPts val="1260"/>
+                <a:spcPts val="1170"/>
               </a:spcAft>
             </a:pPr>
             <a:r>
-              <a:rPr sz="2800" b="1">
+              <a:rPr sz="2600" b="1">
                 <a:solidFill>
                   <a:srgbClr val="1F2A44"/>
                 </a:solidFill>
                 <a:latin typeface="Nunito Sans"/>
               </a:rPr>
-              <a:t>Es el rechazo, la burla o la agresión a alguien por su orientación o su identidad de género.</a:t>
+              <a:t>En el Casco Viejo, un camarero atiende con sonrisas a unos turistas extranjeros que gastan mucho. Cuando entra un hombre sin hogar, nacido en Bilbao, le dice que se vaya.</a:t>
             </a:r>
           </a:p>
         </p:txBody>
@@ -3917,8 +3918,8 @@
         </p:nvSpPr>
         <p:spPr>
           <a:xfrm>
-            <a:off x="640000" y="3000000"/>
-            <a:ext cx="10912000" cy="3458000"/>
+            <a:off x="640000" y="2900000"/>
+            <a:ext cx="10912000" cy="3500000"/>
           </a:xfrm>
           <a:prstGeom prst="rect">
             <a:avLst/>
@@ -3933,173 +3934,101 @@
           <a:p>
             <a:pPr>
               <a:spcAft>
-                <a:spcPts val="1260"/>
+                <a:spcPts val="1080"/>
               </a:spcAft>
             </a:pPr>
             <a:r>
-              <a:rPr sz="2800" b="1">
+              <a:rPr sz="2400" b="1">
                 <a:solidFill>
                   <a:srgbClr val="E8793A"/>
                 </a:solidFill>
                 <a:latin typeface="Nunito Sans"/>
               </a:rPr>
-              <a:t>• </a:t>
-            </a:r>
-            <a:r>
-              <a:rPr sz="2800" b="1">
+              <a:t>1. </a:t>
+            </a:r>
+            <a:r>
+              <a:rPr sz="2400" b="0">
                 <a:solidFill>
                   <a:srgbClr val="1F2A44"/>
                 </a:solidFill>
                 <a:latin typeface="Nunito Sans"/>
               </a:rPr>
-              <a:t>LGTBI:</a:t>
-            </a:r>
-            <a:r>
-              <a:rPr sz="2800" b="0">
-                <a:solidFill>
-                  <a:srgbClr val="1F2A44"/>
-                </a:solidFill>
-                <a:latin typeface="Nunito Sans"/>
-              </a:rPr>
-              <a:t> lesbianas, gais, trans, bisexuales e intersexuales</a:t>
+              <a:t>¿Rechaza a los de fuera? No: a los turistas extranjeros los trata muy bien.</a:t>
             </a:r>
           </a:p>
           <a:p>
             <a:pPr>
               <a:spcAft>
-                <a:spcPts val="1260"/>
+                <a:spcPts val="1080"/>
               </a:spcAft>
             </a:pPr>
             <a:r>
-              <a:rPr sz="2800" b="1">
+              <a:rPr sz="2400" b="1">
                 <a:solidFill>
                   <a:srgbClr val="E8793A"/>
                 </a:solidFill>
                 <a:latin typeface="Nunito Sans"/>
               </a:rPr>
-              <a:t>• </a:t>
-            </a:r>
-            <a:r>
-              <a:rPr sz="2800" b="1">
+              <a:t>2. </a:t>
+            </a:r>
+            <a:r>
+              <a:rPr sz="2400" b="0">
                 <a:solidFill>
                   <a:srgbClr val="1F2A44"/>
                 </a:solidFill>
                 <a:latin typeface="Nunito Sans"/>
               </a:rPr>
-              <a:t>Intersexual:</a:t>
-            </a:r>
-            <a:r>
-              <a:rPr sz="2800" b="0">
-                <a:solidFill>
-                  <a:srgbClr val="1F2A44"/>
-                </a:solidFill>
-                <a:latin typeface="Nunito Sans"/>
-              </a:rPr>
-              <a:t> cuerpo no del todo típico de hombre ni de mujer</a:t>
+              <a:t>Al hombre sin hogar lo echa, y es de aquí. ¿Qué le molesta de él? Su pobreza.</a:t>
             </a:r>
           </a:p>
           <a:p>
             <a:pPr>
               <a:spcAft>
-                <a:spcPts val="1260"/>
+                <a:spcPts val="1080"/>
               </a:spcAft>
             </a:pPr>
             <a:r>
-              <a:rPr sz="2800" b="1">
+              <a:rPr sz="2400" b="1">
                 <a:solidFill>
                   <a:srgbClr val="E8793A"/>
                 </a:solidFill>
                 <a:latin typeface="Nunito Sans"/>
               </a:rPr>
-              <a:t>• </a:t>
-            </a:r>
-            <a:r>
-              <a:rPr sz="2800" b="0">
+              <a:t>3. </a:t>
+            </a:r>
+            <a:r>
+              <a:rPr sz="2400" b="0">
                 <a:solidFill>
                   <a:srgbClr val="1F2A44"/>
                 </a:solidFill>
                 <a:latin typeface="Nunito Sans"/>
               </a:rPr>
-              <a:t>Es una forma de </a:t>
-            </a:r>
-            <a:r>
-              <a:rPr sz="2800" b="1">
-                <a:solidFill>
-                  <a:srgbClr val="1F2A44"/>
-                </a:solidFill>
-                <a:latin typeface="Nunito Sans"/>
-              </a:rPr>
-              <a:t>exclusión</a:t>
-            </a:r>
-            <a:r>
-              <a:rPr sz="2800" b="0">
-                <a:solidFill>
-                  <a:srgbClr val="1F2A44"/>
-                </a:solidFill>
-                <a:latin typeface="Nunito Sans"/>
-              </a:rPr>
-              <a:t>: dejar a alguien fuera</a:t>
+              <a:t>Es justo la idea de Adela Cortina: el rechazo va contra el pobre.</a:t>
             </a:r>
           </a:p>
           <a:p>
             <a:pPr>
               <a:spcAft>
-                <a:spcPts val="1260"/>
+                <a:spcPts val="1080"/>
               </a:spcAft>
             </a:pPr>
             <a:r>
-              <a:rPr sz="2800" b="1">
+              <a:rPr sz="2400" b="1">
                 <a:solidFill>
                   <a:srgbClr val="E8793A"/>
                 </a:solidFill>
                 <a:latin typeface="Nunito Sans"/>
               </a:rPr>
-              <a:t>• </a:t>
-            </a:r>
-            <a:r>
-              <a:rPr sz="2800" b="0">
+              <a:t>4. </a:t>
+            </a:r>
+            <a:r>
+              <a:rPr sz="2400" b="0">
                 <a:solidFill>
                   <a:srgbClr val="1F2A44"/>
                 </a:solidFill>
                 <a:latin typeface="Nunito Sans"/>
               </a:rPr>
-              <a:t>Como vimos en la sesión 66: «</a:t>
-            </a:r>
-            <a:r>
-              <a:rPr sz="2800" b="1">
-                <a:solidFill>
-                  <a:srgbClr val="1F2A44"/>
-                </a:solidFill>
-                <a:latin typeface="Nunito Sans"/>
-              </a:rPr>
-              <a:t>nosotros</a:t>
-            </a:r>
-            <a:r>
-              <a:rPr sz="2800" b="0">
-                <a:solidFill>
-                  <a:srgbClr val="1F2A44"/>
-                </a:solidFill>
-                <a:latin typeface="Nunito Sans"/>
-              </a:rPr>
-              <a:t>» frente a «</a:t>
-            </a:r>
-            <a:r>
-              <a:rPr sz="2800" b="1">
-                <a:solidFill>
-                  <a:srgbClr val="1F2A44"/>
-                </a:solidFill>
-                <a:latin typeface="Nunito Sans"/>
-              </a:rPr>
-              <a:t>ellos</a:t>
-            </a:r>
-            <a:r>
-              <a:rPr sz="2800" b="0">
-                <a:solidFill>
-                  <a:srgbClr val="1F2A44"/>
-                </a:solidFill>
-                <a:latin typeface="Nunito Sans"/>
-              </a:rPr>
-              <a:t>»</a:t>
+              <a:t>Conclusión: es aporofobia. A veces lo que parece xenofobia es, sobre todo, rechazo al pobre.</a:t>
             </a:r>
           </a:p>
         </p:txBody>
@@ -4164,7 +4093,7 @@
                 </a:solidFill>
                 <a:latin typeface="Nunito Sans"/>
               </a:rPr>
-              <a:t>BLOQUE 2 · RESPETO FRENTE A BURLA</a:t>
+              <a:t>BLOQUE 2 · CASOS RESUELTOS</a:t>
             </a:r>
           </a:p>
         </p:txBody>
@@ -4203,7 +4132,7 @@
                 </a:solidFill>
                 <a:latin typeface="Fredoka"/>
               </a:rPr>
-              <a:t>Burla y respeto</a:t>
+              <a:t>Caso 2 · Por qué no se va</a:t>
             </a:r>
           </a:p>
         </p:txBody>
@@ -4216,14 +4145,14 @@
         </p:nvSpPr>
         <p:spPr>
           <a:xfrm>
-            <a:off x="640000" y="1650000"/>
-            <a:ext cx="5306000" cy="4400000"/>
+            <a:off x="640000" y="1600000"/>
+            <a:ext cx="10912000" cy="1100000"/>
           </a:xfrm>
           <a:prstGeom prst="rect">
             <a:avLst/>
           </a:prstGeom>
           <a:solidFill>
-            <a:srgbClr val="FBE3D2"/>
+            <a:srgbClr val="FFFFFF"/>
           </a:solidFill>
           <a:ln>
             <a:noFill/>
@@ -4259,8 +4188,8 @@
         </p:nvSpPr>
         <p:spPr>
           <a:xfrm>
-            <a:off x="840000" y="1750000"/>
-            <a:ext cx="4906000" cy="600000"/>
+            <a:off x="840000" y="1650000"/>
+            <a:ext cx="10512000" cy="1000000"/>
           </a:xfrm>
           <a:prstGeom prst="rect">
             <a:avLst/>
@@ -4268,46 +4197,7 @@
           <a:noFill/>
         </p:spPr>
         <p:txBody>
-          <a:bodyPr wrap="square">
-            <a:spAutoFit/>
-          </a:bodyPr>
-          <a:lstStyle/>
-          <a:p>
-            <a:pPr>
-              <a:spcAft>
-                <a:spcPts val="1260"/>
-              </a:spcAft>
-            </a:pPr>
-            <a:r>
-              <a:rPr sz="2800" b="1">
-                <a:solidFill>
-                  <a:srgbClr val="C2531C"/>
-                </a:solidFill>
-                <a:latin typeface="Nunito Sans"/>
-              </a:rPr>
-              <a:t>Burla</a:t>
-            </a:r>
-          </a:p>
-        </p:txBody>
-      </p:sp>
-      <p:sp>
-        <p:nvSpPr>
-          <p:cNvPr id="6" name="TextBox 5"/>
-          <p:cNvSpPr txBox="1"/>
-          <p:nvPr/>
-        </p:nvSpPr>
-        <p:spPr>
-          <a:xfrm>
-            <a:off x="840000" y="2400000"/>
-            <a:ext cx="4906000" cy="3500000"/>
-          </a:xfrm>
-          <a:prstGeom prst="rect">
-            <a:avLst/>
-          </a:prstGeom>
-          <a:noFill/>
-        </p:spPr>
-        <p:txBody>
-          <a:bodyPr wrap="square">
+          <a:bodyPr wrap="square" anchor="ctr">
             <a:spAutoFit/>
           </a:bodyPr>
           <a:lstStyle/>
@@ -4320,152 +4210,25 @@
             <a:r>
               <a:rPr sz="2600" b="1">
                 <a:solidFill>
-                  <a:srgbClr val="E8793A"/>
-                </a:solidFill>
-                <a:latin typeface="Nunito Sans"/>
-              </a:rPr>
-              <a:t>• </a:t>
-            </a:r>
-            <a:r>
-              <a:rPr sz="2600" b="0">
-                <a:solidFill>
                   <a:srgbClr val="1F2A44"/>
                 </a:solidFill>
                 <a:latin typeface="Nunito Sans"/>
               </a:rPr>
-              <a:t>Usar «gay» como insulto</a:t>
-            </a:r>
-          </a:p>
-          <a:p>
-            <a:pPr>
-              <a:spcAft>
-                <a:spcPts val="1170"/>
-              </a:spcAft>
-            </a:pPr>
-            <a:r>
-              <a:rPr sz="2600" b="1">
-                <a:solidFill>
-                  <a:srgbClr val="E8793A"/>
-                </a:solidFill>
-                <a:latin typeface="Nunito Sans"/>
-              </a:rPr>
-              <a:t>• </a:t>
-            </a:r>
-            <a:r>
-              <a:rPr sz="2600" b="0">
-                <a:solidFill>
-                  <a:srgbClr val="1F2A44"/>
-                </a:solidFill>
-                <a:latin typeface="Nunito Sans"/>
-              </a:rPr>
-              <a:t>Reírse de cómo viste o habla alguien</a:t>
-            </a:r>
-          </a:p>
-          <a:p>
-            <a:pPr>
-              <a:spcAft>
-                <a:spcPts val="1170"/>
-              </a:spcAft>
-            </a:pPr>
-            <a:r>
-              <a:rPr sz="2600" b="1">
-                <a:solidFill>
-                  <a:srgbClr val="E8793A"/>
-                </a:solidFill>
-                <a:latin typeface="Nunito Sans"/>
-              </a:rPr>
-              <a:t>• </a:t>
-            </a:r>
-            <a:r>
-              <a:rPr sz="2600" b="0">
-                <a:solidFill>
-                  <a:srgbClr val="1F2A44"/>
-                </a:solidFill>
-                <a:latin typeface="Nunito Sans"/>
-              </a:rPr>
-              <a:t>Adivinar y contar la orientación de otro</a:t>
-            </a:r>
-          </a:p>
-          <a:p>
-            <a:pPr>
-              <a:spcAft>
-                <a:spcPts val="1170"/>
-              </a:spcAft>
-            </a:pPr>
-            <a:r>
-              <a:rPr sz="2600" b="1">
-                <a:solidFill>
-                  <a:srgbClr val="E8793A"/>
-                </a:solidFill>
-                <a:latin typeface="Nunito Sans"/>
-              </a:rPr>
-              <a:t>• </a:t>
-            </a:r>
-            <a:r>
-              <a:rPr sz="2600" b="0">
-                <a:solidFill>
-                  <a:srgbClr val="1F2A44"/>
-                </a:solidFill>
-                <a:latin typeface="Nunito Sans"/>
-              </a:rPr>
-              <a:t>«Solo era una broma»</a:t>
-            </a:r>
-          </a:p>
-        </p:txBody>
-      </p:sp>
-      <p:sp>
-        <p:nvSpPr>
-          <p:cNvPr id="7" name="Rectangle 6"/>
-          <p:cNvSpPr/>
-          <p:nvPr/>
-        </p:nvSpPr>
-        <p:spPr>
-          <a:xfrm>
-            <a:off x="6246000" y="1650000"/>
-            <a:ext cx="5306000" cy="4400000"/>
-          </a:xfrm>
-          <a:prstGeom prst="rect">
-            <a:avLst/>
-          </a:prstGeom>
-          <a:solidFill>
-            <a:srgbClr val="EAF0F7"/>
-          </a:solidFill>
-          <a:ln>
-            <a:noFill/>
-          </a:ln>
-        </p:spPr>
-        <p:style>
-          <a:lnRef idx="1">
-            <a:schemeClr val="accent1"/>
-          </a:lnRef>
-          <a:fillRef idx="3">
-            <a:schemeClr val="accent1"/>
-          </a:fillRef>
-          <a:effectRef idx="2">
-            <a:schemeClr val="accent1"/>
-          </a:effectRef>
-          <a:fontRef idx="minor">
-            <a:schemeClr val="lt1"/>
-          </a:fontRef>
-        </p:style>
-        <p:txBody>
-          <a:bodyPr rtlCol="0" anchor="ctr"/>
-          <a:lstStyle/>
-          <a:p>
-            <a:pPr algn="ctr"/>
-          </a:p>
-        </p:txBody>
-      </p:sp>
-      <p:sp>
-        <p:nvSpPr>
-          <p:cNvPr id="8" name="TextBox 7"/>
+              <a:t>Un chico cree que los de un barrio inventado son conflictivos. Si uno hace algo mal, lo recuerda durante meses. Los cien que no hacen nada malo, ni los ve.</a:t>
+            </a:r>
+          </a:p>
+        </p:txBody>
+      </p:sp>
+      <p:sp>
+        <p:nvSpPr>
+          <p:cNvPr id="6" name="TextBox 5"/>
           <p:cNvSpPr txBox="1"/>
           <p:nvPr/>
         </p:nvSpPr>
         <p:spPr>
           <a:xfrm>
-            <a:off x="6446000" y="1750000"/>
-            <a:ext cx="4906000" cy="600000"/>
+            <a:off x="640000" y="2900000"/>
+            <a:ext cx="10912000" cy="3500000"/>
           </a:xfrm>
           <a:prstGeom prst="rect">
             <a:avLst/>
@@ -4480,140 +4243,101 @@
           <a:p>
             <a:pPr>
               <a:spcAft>
-                <a:spcPts val="1260"/>
+                <a:spcPts val="1080"/>
               </a:spcAft>
             </a:pPr>
             <a:r>
-              <a:rPr sz="2800" b="1">
-                <a:solidFill>
-                  <a:srgbClr val="2F6FB5"/>
-                </a:solidFill>
-                <a:latin typeface="Nunito Sans"/>
-              </a:rPr>
-              <a:t>Respeto</a:t>
-            </a:r>
-          </a:p>
-        </p:txBody>
-      </p:sp>
-      <p:sp>
-        <p:nvSpPr>
-          <p:cNvPr id="9" name="TextBox 8"/>
-          <p:cNvSpPr txBox="1"/>
-          <p:nvPr/>
-        </p:nvSpPr>
-        <p:spPr>
-          <a:xfrm>
-            <a:off x="6446000" y="2400000"/>
-            <a:ext cx="4906000" cy="3500000"/>
-          </a:xfrm>
-          <a:prstGeom prst="rect">
-            <a:avLst/>
-          </a:prstGeom>
-          <a:noFill/>
-        </p:spPr>
-        <p:txBody>
-          <a:bodyPr wrap="square">
-            <a:spAutoFit/>
-          </a:bodyPr>
-          <a:lstStyle/>
+              <a:rPr sz="2400" b="1">
+                <a:solidFill>
+                  <a:srgbClr val="E8793A"/>
+                </a:solidFill>
+                <a:latin typeface="Nunito Sans"/>
+              </a:rPr>
+              <a:t>1. </a:t>
+            </a:r>
+            <a:r>
+              <a:rPr sz="2400" b="0">
+                <a:solidFill>
+                  <a:srgbClr val="1F2A44"/>
+                </a:solidFill>
+                <a:latin typeface="Nunito Sans"/>
+              </a:rPr>
+              <a:t>Ese chico se fija solo en lo que confirma su idea: sesgo de confirmación (sesión 45).</a:t>
+            </a:r>
+          </a:p>
           <a:p>
             <a:pPr>
               <a:spcAft>
-                <a:spcPts val="1170"/>
+                <a:spcPts val="1080"/>
               </a:spcAft>
             </a:pPr>
             <a:r>
-              <a:rPr sz="2600" b="1">
+              <a:rPr sz="2400" b="1">
                 <a:solidFill>
                   <a:srgbClr val="E8793A"/>
                 </a:solidFill>
                 <a:latin typeface="Nunito Sans"/>
               </a:rPr>
-              <a:t>• </a:t>
-            </a:r>
-            <a:r>
-              <a:rPr sz="2600" b="0">
+              <a:t>2. </a:t>
+            </a:r>
+            <a:r>
+              <a:rPr sz="2400" b="0">
                 <a:solidFill>
                   <a:srgbClr val="1F2A44"/>
                 </a:solidFill>
                 <a:latin typeface="Nunito Sans"/>
               </a:rPr>
-              <a:t>Llamar a cada persona por el nombre que pide</a:t>
+              <a:t>Además, ve a «los de ese barrio» como un bloque: nosotros y ellos (sesión 66).</a:t>
             </a:r>
           </a:p>
           <a:p>
             <a:pPr>
               <a:spcAft>
-                <a:spcPts val="1170"/>
+                <a:spcPts val="1080"/>
               </a:spcAft>
             </a:pPr>
             <a:r>
-              <a:rPr sz="2600" b="1">
+              <a:rPr sz="2400" b="1">
                 <a:solidFill>
                   <a:srgbClr val="E8793A"/>
                 </a:solidFill>
                 <a:latin typeface="Nunito Sans"/>
               </a:rPr>
-              <a:t>• </a:t>
-            </a:r>
-            <a:r>
-              <a:rPr sz="2600" b="0">
+              <a:t>3. </a:t>
+            </a:r>
+            <a:r>
+              <a:rPr sz="2400" b="0">
                 <a:solidFill>
                   <a:srgbClr val="1F2A44"/>
                 </a:solidFill>
                 <a:latin typeface="Nunito Sans"/>
               </a:rPr>
-              <a:t>Tratar a todos igual en el grupo</a:t>
+              <a:t>Así, cada caso nuevo parece darle la razón, y el prejuicio crece.</a:t>
             </a:r>
           </a:p>
           <a:p>
             <a:pPr>
               <a:spcAft>
-                <a:spcPts val="1170"/>
+                <a:spcPts val="1080"/>
               </a:spcAft>
             </a:pPr>
             <a:r>
-              <a:rPr sz="2600" b="1">
+              <a:rPr sz="2400" b="1">
                 <a:solidFill>
                   <a:srgbClr val="E8793A"/>
                 </a:solidFill>
                 <a:latin typeface="Nunito Sans"/>
               </a:rPr>
-              <a:t>• </a:t>
-            </a:r>
-            <a:r>
-              <a:rPr sz="2600" b="0">
+              <a:t>4. </a:t>
+            </a:r>
+            <a:r>
+              <a:rPr sz="2400" b="0">
                 <a:solidFill>
                   <a:srgbClr val="1F2A44"/>
                 </a:solidFill>
                 <a:latin typeface="Nunito Sans"/>
               </a:rPr>
-              <a:t>Dejar que cada uno cuente lo suyo, si quiere</a:t>
-            </a:r>
-          </a:p>
-          <a:p>
-            <a:pPr>
-              <a:spcAft>
-                <a:spcPts val="1170"/>
-              </a:spcAft>
-            </a:pPr>
-            <a:r>
-              <a:rPr sz="2600" b="1">
-                <a:solidFill>
-                  <a:srgbClr val="E8793A"/>
-                </a:solidFill>
-                <a:latin typeface="Nunito Sans"/>
-              </a:rPr>
-              <a:t>• </a:t>
-            </a:r>
-            <a:r>
-              <a:rPr sz="2600" b="0">
-                <a:solidFill>
-                  <a:srgbClr val="1F2A44"/>
-                </a:solidFill>
-                <a:latin typeface="Nunito Sans"/>
-              </a:rPr>
-              <a:t>No reírse con quien se burla</a:t>
+              <a:t>Conclusión: el prejuicio se mantiene porque solo mira los casos que le convienen.</a:t>
             </a:r>
           </a:p>
         </p:txBody>
@@ -4627,315 +4351,6 @@
 </file>
 
 <file path=ppt/slides/slide13.xml><?xml version="1.0" encoding="utf-8"?>
-<p:sld xmlns:a="http://schemas.openxmlformats.org/drawingml/2006/main" xmlns:p="http://schemas.openxmlformats.org/presentationml/2006/main" xmlns:r="http://schemas.openxmlformats.org/officeDocument/2006/relationships">
-  <p:cSld>
-    <p:bg>
-      <p:bgPr>
-        <a:solidFill>
-          <a:srgbClr val="FBF7EF"/>
-        </a:solidFill>
-        <a:effectLst/>
-      </p:bgPr>
-    </p:bg>
-    <p:spTree>
-      <p:nvGrpSpPr>
-        <p:cNvPr id="1" name=""/>
-        <p:cNvGrpSpPr/>
-        <p:nvPr/>
-      </p:nvGrpSpPr>
-      <p:grpSpPr/>
-      <p:sp>
-        <p:nvSpPr>
-          <p:cNvPr id="2" name="TextBox 1"/>
-          <p:cNvSpPr txBox="1"/>
-          <p:nvPr/>
-        </p:nvSpPr>
-        <p:spPr>
-          <a:xfrm>
-            <a:off x="640000" y="380000"/>
-            <a:ext cx="10912000" cy="420000"/>
-          </a:xfrm>
-          <a:prstGeom prst="rect">
-            <a:avLst/>
-          </a:prstGeom>
-          <a:noFill/>
-        </p:spPr>
-        <p:txBody>
-          <a:bodyPr wrap="square">
-            <a:spAutoFit/>
-          </a:bodyPr>
-          <a:lstStyle/>
-          <a:p>
-            <a:pPr>
-              <a:spcAft>
-                <a:spcPts val="630"/>
-              </a:spcAft>
-            </a:pPr>
-            <a:r>
-              <a:rPr sz="1400" b="1">
-                <a:solidFill>
-                  <a:srgbClr val="E8793A"/>
-                </a:solidFill>
-                <a:latin typeface="Nunito Sans"/>
-              </a:rPr>
-              <a:t>BLOQUE 2 · RESPETO FRENTE A BURLA</a:t>
-            </a:r>
-          </a:p>
-        </p:txBody>
-      </p:sp>
-      <p:sp>
-        <p:nvSpPr>
-          <p:cNvPr id="3" name="TextBox 2"/>
-          <p:cNvSpPr txBox="1"/>
-          <p:nvPr/>
-        </p:nvSpPr>
-        <p:spPr>
-          <a:xfrm>
-            <a:off x="640000" y="760000"/>
-            <a:ext cx="10912000" cy="800000"/>
-          </a:xfrm>
-          <a:prstGeom prst="rect">
-            <a:avLst/>
-          </a:prstGeom>
-          <a:noFill/>
-        </p:spPr>
-        <p:txBody>
-          <a:bodyPr wrap="square">
-            <a:spAutoFit/>
-          </a:bodyPr>
-          <a:lstStyle/>
-          <a:p>
-            <a:pPr>
-              <a:spcAft>
-                <a:spcPts val="1710"/>
-              </a:spcAft>
-            </a:pPr>
-            <a:r>
-              <a:rPr sz="3800" b="1">
-                <a:solidFill>
-                  <a:srgbClr val="1F2A44"/>
-                </a:solidFill>
-                <a:latin typeface="Fredoka"/>
-              </a:rPr>
-              <a:t>Caso 2 · «Solo era una broma»</a:t>
-            </a:r>
-          </a:p>
-        </p:txBody>
-      </p:sp>
-      <p:sp>
-        <p:nvSpPr>
-          <p:cNvPr id="4" name="Rectangle 3"/>
-          <p:cNvSpPr/>
-          <p:nvPr/>
-        </p:nvSpPr>
-        <p:spPr>
-          <a:xfrm>
-            <a:off x="640000" y="1600000"/>
-            <a:ext cx="10912000" cy="1100000"/>
-          </a:xfrm>
-          <a:prstGeom prst="rect">
-            <a:avLst/>
-          </a:prstGeom>
-          <a:solidFill>
-            <a:srgbClr val="FFFFFF"/>
-          </a:solidFill>
-          <a:ln>
-            <a:noFill/>
-          </a:ln>
-        </p:spPr>
-        <p:style>
-          <a:lnRef idx="1">
-            <a:schemeClr val="accent1"/>
-          </a:lnRef>
-          <a:fillRef idx="3">
-            <a:schemeClr val="accent1"/>
-          </a:fillRef>
-          <a:effectRef idx="2">
-            <a:schemeClr val="accent1"/>
-          </a:effectRef>
-          <a:fontRef idx="minor">
-            <a:schemeClr val="lt1"/>
-          </a:fontRef>
-        </p:style>
-        <p:txBody>
-          <a:bodyPr rtlCol="0" anchor="ctr"/>
-          <a:lstStyle/>
-          <a:p>
-            <a:pPr algn="ctr"/>
-          </a:p>
-        </p:txBody>
-      </p:sp>
-      <p:sp>
-        <p:nvSpPr>
-          <p:cNvPr id="5" name="TextBox 4"/>
-          <p:cNvSpPr txBox="1"/>
-          <p:nvPr/>
-        </p:nvSpPr>
-        <p:spPr>
-          <a:xfrm>
-            <a:off x="840000" y="1650000"/>
-            <a:ext cx="10512000" cy="1000000"/>
-          </a:xfrm>
-          <a:prstGeom prst="rect">
-            <a:avLst/>
-          </a:prstGeom>
-          <a:noFill/>
-        </p:spPr>
-        <p:txBody>
-          <a:bodyPr wrap="square" anchor="ctr">
-            <a:spAutoFit/>
-          </a:bodyPr>
-          <a:lstStyle/>
-          <a:p>
-            <a:pPr>
-              <a:spcAft>
-                <a:spcPts val="1170"/>
-              </a:spcAft>
-            </a:pPr>
-            <a:r>
-              <a:rPr sz="2600" b="1">
-                <a:solidFill>
-                  <a:srgbClr val="1F2A44"/>
-                </a:solidFill>
-                <a:latin typeface="Nunito Sans"/>
-              </a:rPr>
-              <a:t>En el vestuario, alguien le grita «¡Qué gay eres!» a un chico por fallar un pase. Luego dice que solo era una broma.</a:t>
-            </a:r>
-          </a:p>
-        </p:txBody>
-      </p:sp>
-      <p:sp>
-        <p:nvSpPr>
-          <p:cNvPr id="6" name="TextBox 5"/>
-          <p:cNvSpPr txBox="1"/>
-          <p:nvPr/>
-        </p:nvSpPr>
-        <p:spPr>
-          <a:xfrm>
-            <a:off x="640000" y="2900000"/>
-            <a:ext cx="10912000" cy="3500000"/>
-          </a:xfrm>
-          <a:prstGeom prst="rect">
-            <a:avLst/>
-          </a:prstGeom>
-          <a:noFill/>
-        </p:spPr>
-        <p:txBody>
-          <a:bodyPr wrap="square">
-            <a:spAutoFit/>
-          </a:bodyPr>
-          <a:lstStyle/>
-          <a:p>
-            <a:pPr>
-              <a:spcAft>
-                <a:spcPts val="1080"/>
-              </a:spcAft>
-            </a:pPr>
-            <a:r>
-              <a:rPr sz="2400" b="1">
-                <a:solidFill>
-                  <a:srgbClr val="E8793A"/>
-                </a:solidFill>
-                <a:latin typeface="Nunito Sans"/>
-              </a:rPr>
-              <a:t>1. </a:t>
-            </a:r>
-            <a:r>
-              <a:rPr sz="2400" b="0">
-                <a:solidFill>
-                  <a:srgbClr val="1F2A44"/>
-                </a:solidFill>
-                <a:latin typeface="Nunito Sans"/>
-              </a:rPr>
-              <a:t>¿Qué dice la frase sin decirlo? Que ser gay es algo malo, algo de lo que reírse.</a:t>
-            </a:r>
-          </a:p>
-          <a:p>
-            <a:pPr>
-              <a:spcAft>
-                <a:spcPts val="1080"/>
-              </a:spcAft>
-            </a:pPr>
-            <a:r>
-              <a:rPr sz="2400" b="1">
-                <a:solidFill>
-                  <a:srgbClr val="E8793A"/>
-                </a:solidFill>
-                <a:latin typeface="Nunito Sans"/>
-              </a:rPr>
-              <a:t>2. </a:t>
-            </a:r>
-            <a:r>
-              <a:rPr sz="2400" b="0">
-                <a:solidFill>
-                  <a:srgbClr val="1F2A44"/>
-                </a:solidFill>
-                <a:latin typeface="Nunito Sans"/>
-              </a:rPr>
-              <a:t>¿A quién hace daño? A ese chico y a cualquier persona gay que lo oiga, aunque calle.</a:t>
-            </a:r>
-          </a:p>
-          <a:p>
-            <a:pPr>
-              <a:spcAft>
-                <a:spcPts val="1080"/>
-              </a:spcAft>
-            </a:pPr>
-            <a:r>
-              <a:rPr sz="2400" b="1">
-                <a:solidFill>
-                  <a:srgbClr val="E8793A"/>
-                </a:solidFill>
-                <a:latin typeface="Nunito Sans"/>
-              </a:rPr>
-              <a:t>3. </a:t>
-            </a:r>
-            <a:r>
-              <a:rPr sz="2400" b="0">
-                <a:solidFill>
-                  <a:srgbClr val="1F2A44"/>
-                </a:solidFill>
-                <a:latin typeface="Nunito Sans"/>
-              </a:rPr>
-              <a:t>Que todos se rían no lo hace bueno: recuerda «todo el mundo lo hace» (sesión 28).</a:t>
-            </a:r>
-          </a:p>
-          <a:p>
-            <a:pPr>
-              <a:spcAft>
-                <a:spcPts val="1080"/>
-              </a:spcAft>
-            </a:pPr>
-            <a:r>
-              <a:rPr sz="2400" b="1">
-                <a:solidFill>
-                  <a:srgbClr val="E8793A"/>
-                </a:solidFill>
-                <a:latin typeface="Nunito Sans"/>
-              </a:rPr>
-              <a:t>4. </a:t>
-            </a:r>
-            <a:r>
-              <a:rPr sz="2400" b="0">
-                <a:solidFill>
-                  <a:srgbClr val="1F2A44"/>
-                </a:solidFill>
-                <a:latin typeface="Nunito Sans"/>
-              </a:rPr>
-              <a:t>Conclusión: una broma que usa a un grupo como insulto es una burla. Y deja a ese grupo fuera.</a:t>
-            </a:r>
-          </a:p>
-        </p:txBody>
-      </p:sp>
-    </p:spTree>
-  </p:cSld>
-  <p:clrMapOvr>
-    <a:masterClrMapping/>
-  </p:clrMapOvr>
-</p:sld>
-</file>
-
-<file path=ppt/slides/slide14.xml><?xml version="1.0" encoding="utf-8"?>
 <p:sld xmlns:a="http://schemas.openxmlformats.org/drawingml/2006/main" xmlns:p="http://schemas.openxmlformats.org/presentationml/2006/main" xmlns:r="http://schemas.openxmlformats.org/officeDocument/2006/relationships">
   <p:cSld>
     <p:bg>
@@ -4987,7 +4402,7 @@
                 </a:solidFill>
                 <a:latin typeface="Nunito Sans"/>
               </a:rPr>
-              <a:t>CASO TRAMPA · BLOQUE 2 · RESPETO FRENTE A BURLA</a:t>
+              <a:t>CASO TRAMPA · BLOQUE 2 · CASOS RESUELTOS</a:t>
             </a:r>
           </a:p>
         </p:txBody>
@@ -5026,7 +4441,7 @@
                 </a:solidFill>
                 <a:latin typeface="Fredoka"/>
               </a:rPr>
-              <a:t>⚠ Se nota por fuera</a:t>
+              <a:t>⚠ «Solo era una broma»</a:t>
             </a:r>
           </a:p>
         </p:txBody>
@@ -5108,7 +4523,7 @@
                 </a:solidFill>
                 <a:latin typeface="Nunito Sans"/>
               </a:rPr>
-              <a:t>Un chico ve un vídeo de un cantante con las uñas pintadas y comenta: «Se nota que es gay».</a:t>
+              <a:t>En el vestuario, un chico suelta «Eso es de gais» cada vez que algo no le gusta. Cuando se lo dicen, contesta: «Solo es una broma. No tengo nada contra nadie».</a:t>
             </a:r>
           </a:p>
         </p:txBody>
@@ -5156,7 +4571,7 @@
                 </a:solidFill>
                 <a:latin typeface="Nunito Sans"/>
               </a:rPr>
-              <a:t>¿Se puede saber así?</a:t>
+              <a:t>Ese chico no quiere hacer daño. ¿Entonces no pasa nada?</a:t>
             </a:r>
           </a:p>
           <a:p>
@@ -5181,7 +4596,7 @@
                 </a:solidFill>
                 <a:latin typeface="Nunito Sans"/>
               </a:rPr>
-              <a:t>Parece una pista: «los chicos no se pintan las uñas».</a:t>
+              <a:t>Parece que no: no odia a nadie y lo dice riéndose.</a:t>
             </a:r>
           </a:p>
           <a:p>
@@ -5206,25 +4621,7 @@
                 </a:solidFill>
                 <a:latin typeface="Nunito Sans"/>
               </a:rPr>
-              <a:t>Pero eso es un </a:t>
-            </a:r>
-            <a:r>
-              <a:rPr sz="2400" b="1">
-                <a:solidFill>
-                  <a:srgbClr val="1F2A44"/>
-                </a:solidFill>
-                <a:latin typeface="Nunito Sans"/>
-              </a:rPr>
-              <a:t>rol de género</a:t>
-            </a:r>
-            <a:r>
-              <a:rPr sz="2400" b="0">
-                <a:solidFill>
-                  <a:srgbClr val="1F2A44"/>
-                </a:solidFill>
-                <a:latin typeface="Nunito Sans"/>
-              </a:rPr>
-              <a:t> (sesión 81). Y el rol no dice nada de la orientación.</a:t>
+              <a:t>Pero usa «gay» como algo malo, como un insulto.</a:t>
             </a:r>
           </a:p>
           <a:p>
@@ -5249,7 +4646,7 @@
                 </a:solidFill>
                 <a:latin typeface="Nunito Sans"/>
               </a:rPr>
-              <a:t>La orientación es hacia quién siente atracción alguien. No se ve en la ropa ni en las uñas: ¿cómo lo sabes?</a:t>
+              <a:t>El mensaje llega igual: quien es gay oye que ser como él es algo negativo.</a:t>
             </a:r>
           </a:p>
           <a:p>
@@ -5274,7 +4671,111 @@
                 </a:solidFill>
                 <a:latin typeface="Nunito Sans"/>
               </a:rPr>
-              <a:t>Conclusión: la orientación no se adivina por la apariencia. Y además es asunto de cada persona.</a:t>
+              <a:t>Conclusión: sin querer, la broma trata una orientación como insulto. Es un trato homófobo, aunque no haya odio.</a:t>
+            </a:r>
+          </a:p>
+        </p:txBody>
+      </p:sp>
+    </p:spTree>
+  </p:cSld>
+  <p:clrMapOvr>
+    <a:masterClrMapping/>
+  </p:clrMapOvr>
+</p:sld>
+</file>
+
+<file path=ppt/slides/slide14.xml><?xml version="1.0" encoding="utf-8"?>
+<p:sld xmlns:a="http://schemas.openxmlformats.org/drawingml/2006/main" xmlns:p="http://schemas.openxmlformats.org/presentationml/2006/main" xmlns:r="http://schemas.openxmlformats.org/officeDocument/2006/relationships">
+  <p:cSld>
+    <p:bg>
+      <p:bgPr>
+        <a:solidFill>
+          <a:srgbClr val="1F2A44"/>
+        </a:solidFill>
+        <a:effectLst/>
+      </p:bgPr>
+    </p:bg>
+    <p:spTree>
+      <p:nvGrpSpPr>
+        <p:cNvPr id="1" name=""/>
+        <p:cNvGrpSpPr/>
+        <p:nvPr/>
+      </p:nvGrpSpPr>
+      <p:grpSpPr/>
+      <p:sp>
+        <p:nvSpPr>
+          <p:cNvPr id="2" name="TextBox 1"/>
+          <p:cNvSpPr txBox="1"/>
+          <p:nvPr/>
+        </p:nvSpPr>
+        <p:spPr>
+          <a:xfrm>
+            <a:off x="640000" y="2300000"/>
+            <a:ext cx="10912000" cy="500000"/>
+          </a:xfrm>
+          <a:prstGeom prst="rect">
+            <a:avLst/>
+          </a:prstGeom>
+          <a:noFill/>
+        </p:spPr>
+        <p:txBody>
+          <a:bodyPr wrap="square">
+            <a:spAutoFit/>
+          </a:bodyPr>
+          <a:lstStyle/>
+          <a:p>
+            <a:pPr>
+              <a:spcAft>
+                <a:spcPts val="810"/>
+              </a:spcAft>
+            </a:pPr>
+            <a:r>
+              <a:rPr sz="1800" b="1">
+                <a:solidFill>
+                  <a:srgbClr val="F4B183"/>
+                </a:solidFill>
+                <a:latin typeface="Nunito Sans"/>
+              </a:rPr>
+              <a:t>BLOQUE 3</a:t>
+            </a:r>
+          </a:p>
+        </p:txBody>
+      </p:sp>
+      <p:sp>
+        <p:nvSpPr>
+          <p:cNvPr id="3" name="TextBox 2"/>
+          <p:cNvSpPr txBox="1"/>
+          <p:nvPr/>
+        </p:nvSpPr>
+        <p:spPr>
+          <a:xfrm>
+            <a:off x="640000" y="2800000"/>
+            <a:ext cx="10912000" cy="800000"/>
+          </a:xfrm>
+          <a:prstGeom prst="rect">
+            <a:avLst/>
+          </a:prstGeom>
+          <a:noFill/>
+        </p:spPr>
+        <p:txBody>
+          <a:bodyPr wrap="square">
+            <a:spAutoFit/>
+          </a:bodyPr>
+          <a:lstStyle/>
+          <a:p>
+            <a:pPr>
+              <a:spcAft>
+                <a:spcPts val="2160"/>
+              </a:spcAft>
+            </a:pPr>
+            <a:r>
+              <a:rPr sz="4800" b="1">
+                <a:solidFill>
+                  <a:srgbClr val="FBF7EF"/>
+                </a:solidFill>
+                <a:latin typeface="Fredoka"/>
+              </a:rPr>
+              <a:t>Frenar un prejuicio</a:t>
             </a:r>
           </a:p>
         </p:txBody>
@@ -5339,7 +4840,7 @@
                 </a:solidFill>
                 <a:latin typeface="Nunito Sans"/>
               </a:rPr>
-              <a:t>LO DE HOY EN TRES LÍNEAS</a:t>
+              <a:t>BLOQUE 3 · FRENAR UN PREJUICIO</a:t>
             </a:r>
           </a:p>
         </p:txBody>
@@ -5378,7 +4879,7 @@
                 </a:solidFill>
                 <a:latin typeface="Fredoka"/>
               </a:rPr>
-              <a:t>Escríbelo tú primero, sin mirar</a:t>
+              <a:t>Cuatro preguntas contra un prejuicio</a:t>
             </a:r>
           </a:p>
         </p:txBody>
@@ -5391,8 +4892,8 @@
         </p:nvSpPr>
         <p:spPr>
           <a:xfrm>
-            <a:off x="640000" y="1800000"/>
-            <a:ext cx="10912000" cy="1500000"/>
+            <a:off x="640000" y="1650000"/>
+            <a:ext cx="10912000" cy="4808000"/>
           </a:xfrm>
           <a:prstGeom prst="rect">
             <a:avLst/>
@@ -5407,17 +4908,128 @@
           <a:p>
             <a:pPr>
               <a:spcAft>
-                <a:spcPts val="1170"/>
+                <a:spcPts val="1260"/>
               </a:spcAft>
             </a:pPr>
             <a:r>
-              <a:rPr sz="2600" b="0">
-                <a:solidFill>
-                  <a:srgbClr val="4A5568"/>
-                </a:solidFill>
-                <a:latin typeface="Nunito Sans"/>
-              </a:rPr>
-              <a:t>Dos minutos. Después lo comparamos.</a:t>
+              <a:rPr sz="2800" b="1">
+                <a:solidFill>
+                  <a:srgbClr val="E8793A"/>
+                </a:solidFill>
+                <a:latin typeface="Nunito Sans"/>
+              </a:rPr>
+              <a:t>• </a:t>
+            </a:r>
+            <a:r>
+              <a:rPr sz="2800" b="1">
+                <a:solidFill>
+                  <a:srgbClr val="1F2A44"/>
+                </a:solidFill>
+                <a:latin typeface="Nunito Sans"/>
+              </a:rPr>
+              <a:t>¿Cómo lo sabes?</a:t>
+            </a:r>
+            <a:r>
+              <a:rPr sz="2800" b="0">
+                <a:solidFill>
+                  <a:srgbClr val="1F2A44"/>
+                </a:solidFill>
+                <a:latin typeface="Nunito Sans"/>
+              </a:rPr>
+              <a:t> ¿Lo has comprobado o lo has oído?</a:t>
+            </a:r>
+          </a:p>
+          <a:p>
+            <a:pPr>
+              <a:spcAft>
+                <a:spcPts val="1260"/>
+              </a:spcAft>
+            </a:pPr>
+            <a:r>
+              <a:rPr sz="2800" b="1">
+                <a:solidFill>
+                  <a:srgbClr val="E8793A"/>
+                </a:solidFill>
+                <a:latin typeface="Nunito Sans"/>
+              </a:rPr>
+              <a:t>• </a:t>
+            </a:r>
+            <a:r>
+              <a:rPr sz="2800" b="1">
+                <a:solidFill>
+                  <a:srgbClr val="1F2A44"/>
+                </a:solidFill>
+                <a:latin typeface="Nunito Sans"/>
+              </a:rPr>
+              <a:t>¿Cuántos casos has mirado?</a:t>
+            </a:r>
+            <a:r>
+              <a:rPr sz="2800" b="0">
+                <a:solidFill>
+                  <a:srgbClr val="1F2A44"/>
+                </a:solidFill>
+                <a:latin typeface="Nunito Sans"/>
+              </a:rPr>
+              <a:t> Uno no basta (sesión 25).</a:t>
+            </a:r>
+          </a:p>
+          <a:p>
+            <a:pPr>
+              <a:spcAft>
+                <a:spcPts val="1260"/>
+              </a:spcAft>
+            </a:pPr>
+            <a:r>
+              <a:rPr sz="2800" b="1">
+                <a:solidFill>
+                  <a:srgbClr val="E8793A"/>
+                </a:solidFill>
+                <a:latin typeface="Nunito Sans"/>
+              </a:rPr>
+              <a:t>• </a:t>
+            </a:r>
+            <a:r>
+              <a:rPr sz="2800" b="1">
+                <a:solidFill>
+                  <a:srgbClr val="1F2A44"/>
+                </a:solidFill>
+                <a:latin typeface="Nunito Sans"/>
+              </a:rPr>
+              <a:t>¿Busco solo lo que me da la razón?</a:t>
+            </a:r>
+            <a:r>
+              <a:rPr sz="2800" b="0">
+                <a:solidFill>
+                  <a:srgbClr val="1F2A44"/>
+                </a:solidFill>
+                <a:latin typeface="Nunito Sans"/>
+              </a:rPr>
+              <a:t> (sesión 45).</a:t>
+            </a:r>
+          </a:p>
+          <a:p>
+            <a:pPr>
+              <a:spcAft>
+                <a:spcPts val="1260"/>
+              </a:spcAft>
+            </a:pPr>
+            <a:r>
+              <a:rPr sz="2800" b="1">
+                <a:solidFill>
+                  <a:srgbClr val="E8793A"/>
+                </a:solidFill>
+                <a:latin typeface="Nunito Sans"/>
+              </a:rPr>
+              <a:t>• </a:t>
+            </a:r>
+            <a:r>
+              <a:rPr sz="2800" b="1">
+                <a:solidFill>
+                  <a:srgbClr val="1F2A44"/>
+                </a:solidFill>
+                <a:latin typeface="Nunito Sans"/>
+              </a:rPr>
+              <a:t>¿Veo a la persona o solo su grupo?</a:t>
             </a:r>
           </a:p>
         </p:txBody>
@@ -5495,8 +5107,8 @@
         </p:nvSpPr>
         <p:spPr>
           <a:xfrm>
-            <a:off x="640000" y="1300000"/>
-            <a:ext cx="10912000" cy="4800000"/>
+            <a:off x="640000" y="760000"/>
+            <a:ext cx="10912000" cy="800000"/>
           </a:xfrm>
           <a:prstGeom prst="rect">
             <a:avLst/>
@@ -5511,76 +5123,56 @@
           <a:p>
             <a:pPr>
               <a:spcAft>
-                <a:spcPts val="1350"/>
+                <a:spcPts val="1710"/>
               </a:spcAft>
             </a:pPr>
             <a:r>
-              <a:rPr sz="3000" b="1">
-                <a:solidFill>
-                  <a:srgbClr val="E8793A"/>
-                </a:solidFill>
-                <a:latin typeface="Nunito Sans"/>
-              </a:rPr>
-              <a:t>1. </a:t>
-            </a:r>
-            <a:r>
-              <a:rPr sz="3000" b="0">
+              <a:rPr sz="3800" b="1">
                 <a:solidFill>
                   <a:srgbClr val="1F2A44"/>
                 </a:solidFill>
-                <a:latin typeface="Nunito Sans"/>
-              </a:rPr>
-              <a:t>La orientación es hacia quién sientes atracción; la identidad de género, cómo te reconoces.</a:t>
-            </a:r>
-          </a:p>
+                <a:latin typeface="Fredoka"/>
+              </a:rPr>
+              <a:t>Escríbelo tú primero, sin mirar</a:t>
+            </a:r>
+          </a:p>
+        </p:txBody>
+      </p:sp>
+      <p:sp>
+        <p:nvSpPr>
+          <p:cNvPr id="4" name="TextBox 3"/>
+          <p:cNvSpPr txBox="1"/>
+          <p:nvPr/>
+        </p:nvSpPr>
+        <p:spPr>
+          <a:xfrm>
+            <a:off x="640000" y="1800000"/>
+            <a:ext cx="10912000" cy="1500000"/>
+          </a:xfrm>
+          <a:prstGeom prst="rect">
+            <a:avLst/>
+          </a:prstGeom>
+          <a:noFill/>
+        </p:spPr>
+        <p:txBody>
+          <a:bodyPr wrap="square">
+            <a:spAutoFit/>
+          </a:bodyPr>
+          <a:lstStyle/>
           <a:p>
             <a:pPr>
               <a:spcAft>
-                <a:spcPts val="1350"/>
+                <a:spcPts val="1170"/>
               </a:spcAft>
             </a:pPr>
             <a:r>
-              <a:rPr sz="3000" b="1">
-                <a:solidFill>
-                  <a:srgbClr val="E8793A"/>
-                </a:solidFill>
-                <a:latin typeface="Nunito Sans"/>
-              </a:rPr>
-              <a:t>2. </a:t>
-            </a:r>
-            <a:r>
-              <a:rPr sz="3000" b="0">
-                <a:solidFill>
-                  <a:srgbClr val="1F2A44"/>
-                </a:solidFill>
-                <a:latin typeface="Nunito Sans"/>
-              </a:rPr>
-              <a:t>En las relaciones solo sí es sí, y se puede cambiar de opinión.</a:t>
-            </a:r>
-          </a:p>
-          <a:p>
-            <a:pPr>
-              <a:spcAft>
-                <a:spcPts val="1350"/>
-              </a:spcAft>
-            </a:pPr>
-            <a:r>
-              <a:rPr sz="3000" b="1">
-                <a:solidFill>
-                  <a:srgbClr val="E8793A"/>
-                </a:solidFill>
-                <a:latin typeface="Nunito Sans"/>
-              </a:rPr>
-              <a:t>3. </a:t>
-            </a:r>
-            <a:r>
-              <a:rPr sz="3000" b="0">
-                <a:solidFill>
-                  <a:srgbClr val="1F2A44"/>
-                </a:solidFill>
-                <a:latin typeface="Nunito Sans"/>
-              </a:rPr>
-              <a:t>Burlarse de alguien por su orientación o identidad es LGTBIfobia: una forma de exclusión.</a:t>
+              <a:rPr sz="2600" b="0">
+                <a:solidFill>
+                  <a:srgbClr val="4A5568"/>
+                </a:solidFill>
+                <a:latin typeface="Nunito Sans"/>
+              </a:rPr>
+              <a:t>Dos minutos. Después lo comparamos.</a:t>
             </a:r>
           </a:p>
         </p:txBody>
@@ -5599,7 +5191,7 @@
     <p:bg>
       <p:bgPr>
         <a:solidFill>
-          <a:srgbClr val="1F2A44"/>
+          <a:srgbClr val="FBF7EF"/>
         </a:solidFill>
         <a:effectLst/>
       </p:bgPr>
@@ -5641,11 +5233,11 @@
             <a:r>
               <a:rPr sz="1400" b="1">
                 <a:solidFill>
-                  <a:srgbClr val="F4B183"/>
-                </a:solidFill>
-                <a:latin typeface="Nunito Sans"/>
-              </a:rPr>
-              <a:t>VÍDEO</a:t>
+                  <a:srgbClr val="E8793A"/>
+                </a:solidFill>
+                <a:latin typeface="Nunito Sans"/>
+              </a:rPr>
+              <a:t>LO DE HOY EN TRES LÍNEAS</a:t>
             </a:r>
           </a:p>
         </p:txBody>
@@ -5658,8 +5250,8 @@
         </p:nvSpPr>
         <p:spPr>
           <a:xfrm>
-            <a:off x="640000" y="760000"/>
-            <a:ext cx="10912000" cy="800000"/>
+            <a:off x="640000" y="1300000"/>
+            <a:ext cx="10912000" cy="4800000"/>
           </a:xfrm>
           <a:prstGeom prst="rect">
             <a:avLst/>
@@ -5674,56 +5266,76 @@
           <a:p>
             <a:pPr>
               <a:spcAft>
-                <a:spcPts val="1620"/>
+                <a:spcPts val="1350"/>
               </a:spcAft>
             </a:pPr>
             <a:r>
-              <a:rPr sz="3600" b="1">
-                <a:solidFill>
-                  <a:srgbClr val="FBF7EF"/>
-                </a:solidFill>
-                <a:latin typeface="Fredoka"/>
-              </a:rPr>
-              <a:t>El consentimiento explicado de forma sencilla y respetuosa</a:t>
-            </a:r>
-          </a:p>
-        </p:txBody>
-      </p:sp>
-      <p:sp>
-        <p:nvSpPr>
-          <p:cNvPr id="4" name="TextBox 3"/>
-          <p:cNvSpPr txBox="1"/>
-          <p:nvPr/>
-        </p:nvSpPr>
-        <p:spPr>
-          <a:xfrm>
-            <a:off x="640000" y="2200000"/>
-            <a:ext cx="10912000" cy="2000000"/>
-          </a:xfrm>
-          <a:prstGeom prst="rect">
-            <a:avLst/>
-          </a:prstGeom>
-          <a:noFill/>
-        </p:spPr>
-        <p:txBody>
-          <a:bodyPr wrap="square">
-            <a:spAutoFit/>
-          </a:bodyPr>
-          <a:lstStyle/>
+              <a:rPr sz="3000" b="1">
+                <a:solidFill>
+                  <a:srgbClr val="E8793A"/>
+                </a:solidFill>
+                <a:latin typeface="Nunito Sans"/>
+              </a:rPr>
+              <a:t>1. </a:t>
+            </a:r>
+            <a:r>
+              <a:rPr sz="3000" b="0">
+                <a:solidFill>
+                  <a:srgbClr val="1F2A44"/>
+                </a:solidFill>
+                <a:latin typeface="Nunito Sans"/>
+              </a:rPr>
+              <a:t>Un prejuicio es juzgar a alguien antes de conocerle, solo por su grupo.</a:t>
+            </a:r>
+          </a:p>
           <a:p>
             <a:pPr>
               <a:spcAft>
-                <a:spcPts val="1080"/>
+                <a:spcPts val="1350"/>
               </a:spcAft>
             </a:pPr>
             <a:r>
-              <a:rPr sz="2400" b="0">
-                <a:solidFill>
-                  <a:srgbClr val="C9D3E6"/>
-                </a:solidFill>
-                <a:latin typeface="Nunito Sans"/>
-              </a:rPr>
-              <a:t>Ver con un ejemplo cotidiano que un sí tiene que ser libre y que se puede retirar.</a:t>
+              <a:rPr sz="3000" b="1">
+                <a:solidFill>
+                  <a:srgbClr val="E8793A"/>
+                </a:solidFill>
+                <a:latin typeface="Nunito Sans"/>
+              </a:rPr>
+              <a:t>2. </a:t>
+            </a:r>
+            <a:r>
+              <a:rPr sz="3000" b="0">
+                <a:solidFill>
+                  <a:srgbClr val="1F2A44"/>
+                </a:solidFill>
+                <a:latin typeface="Nunito Sans"/>
+              </a:rPr>
+              <a:t>La aporofobia es el rechazo al pobre; Adela Cortina creó la palabra.</a:t>
+            </a:r>
+          </a:p>
+          <a:p>
+            <a:pPr>
+              <a:spcAft>
+                <a:spcPts val="1350"/>
+              </a:spcAft>
+            </a:pPr>
+            <a:r>
+              <a:rPr sz="3000" b="1">
+                <a:solidFill>
+                  <a:srgbClr val="E8793A"/>
+                </a:solidFill>
+                <a:latin typeface="Nunito Sans"/>
+              </a:rPr>
+              <a:t>3. </a:t>
+            </a:r>
+            <a:r>
+              <a:rPr sz="3000" b="0">
+                <a:solidFill>
+                  <a:srgbClr val="1F2A44"/>
+                </a:solidFill>
+                <a:latin typeface="Nunito Sans"/>
+              </a:rPr>
+              <a:t>El sesgo de confirmación mantiene los prejuicios: mira solo los casos que convienen.</a:t>
             </a:r>
           </a:p>
         </p:txBody>
@@ -5788,6 +5400,149 @@
                 </a:solidFill>
                 <a:latin typeface="Nunito Sans"/>
               </a:rPr>
+              <a:t>VÍDEO</a:t>
+            </a:r>
+          </a:p>
+        </p:txBody>
+      </p:sp>
+      <p:sp>
+        <p:nvSpPr>
+          <p:cNvPr id="3" name="TextBox 2"/>
+          <p:cNvSpPr txBox="1"/>
+          <p:nvPr/>
+        </p:nvSpPr>
+        <p:spPr>
+          <a:xfrm>
+            <a:off x="640000" y="760000"/>
+            <a:ext cx="10912000" cy="800000"/>
+          </a:xfrm>
+          <a:prstGeom prst="rect">
+            <a:avLst/>
+          </a:prstGeom>
+          <a:noFill/>
+        </p:spPr>
+        <p:txBody>
+          <a:bodyPr wrap="square">
+            <a:spAutoFit/>
+          </a:bodyPr>
+          <a:lstStyle/>
+          <a:p>
+            <a:pPr>
+              <a:spcAft>
+                <a:spcPts val="1620"/>
+              </a:spcAft>
+            </a:pPr>
+            <a:r>
+              <a:rPr sz="3600" b="1">
+                <a:solidFill>
+                  <a:srgbClr val="FBF7EF"/>
+                </a:solidFill>
+                <a:latin typeface="Fredoka"/>
+              </a:rPr>
+              <a:t>Adela Cortina explica la aporofobia, el rechazo al pobre</a:t>
+            </a:r>
+          </a:p>
+        </p:txBody>
+      </p:sp>
+      <p:sp>
+        <p:nvSpPr>
+          <p:cNvPr id="4" name="TextBox 3"/>
+          <p:cNvSpPr txBox="1"/>
+          <p:nvPr/>
+        </p:nvSpPr>
+        <p:spPr>
+          <a:xfrm>
+            <a:off x="640000" y="2200000"/>
+            <a:ext cx="10912000" cy="2000000"/>
+          </a:xfrm>
+          <a:prstGeom prst="rect">
+            <a:avLst/>
+          </a:prstGeom>
+          <a:noFill/>
+        </p:spPr>
+        <p:txBody>
+          <a:bodyPr wrap="square">
+            <a:spAutoFit/>
+          </a:bodyPr>
+          <a:lstStyle/>
+          <a:p>
+            <a:pPr>
+              <a:spcAft>
+                <a:spcPts val="1080"/>
+              </a:spcAft>
+            </a:pPr>
+            <a:r>
+              <a:rPr sz="2400" b="0">
+                <a:solidFill>
+                  <a:srgbClr val="C9D3E6"/>
+                </a:solidFill>
+                <a:latin typeface="Nunito Sans"/>
+              </a:rPr>
+              <a:t>Que oigan a la autora explicar con sus palabras por qué el rechazo va, muchas veces, contra el pobre.</a:t>
+            </a:r>
+          </a:p>
+        </p:txBody>
+      </p:sp>
+    </p:spTree>
+  </p:cSld>
+  <p:clrMapOvr>
+    <a:masterClrMapping/>
+  </p:clrMapOvr>
+</p:sld>
+</file>
+
+<file path=ppt/slides/slide19.xml><?xml version="1.0" encoding="utf-8"?>
+<p:sld xmlns:a="http://schemas.openxmlformats.org/drawingml/2006/main" xmlns:p="http://schemas.openxmlformats.org/presentationml/2006/main" xmlns:r="http://schemas.openxmlformats.org/officeDocument/2006/relationships">
+  <p:cSld>
+    <p:bg>
+      <p:bgPr>
+        <a:solidFill>
+          <a:srgbClr val="1F2A44"/>
+        </a:solidFill>
+        <a:effectLst/>
+      </p:bgPr>
+    </p:bg>
+    <p:spTree>
+      <p:nvGrpSpPr>
+        <p:cNvPr id="1" name=""/>
+        <p:cNvGrpSpPr/>
+        <p:nvPr/>
+      </p:nvGrpSpPr>
+      <p:grpSpPr/>
+      <p:sp>
+        <p:nvSpPr>
+          <p:cNvPr id="2" name="TextBox 1"/>
+          <p:cNvSpPr txBox="1"/>
+          <p:nvPr/>
+        </p:nvSpPr>
+        <p:spPr>
+          <a:xfrm>
+            <a:off x="640000" y="380000"/>
+            <a:ext cx="10912000" cy="420000"/>
+          </a:xfrm>
+          <a:prstGeom prst="rect">
+            <a:avLst/>
+          </a:prstGeom>
+          <a:noFill/>
+        </p:spPr>
+        <p:txBody>
+          <a:bodyPr wrap="square">
+            <a:spAutoFit/>
+          </a:bodyPr>
+          <a:lstStyle/>
+          <a:p>
+            <a:pPr>
+              <a:spcAft>
+                <a:spcPts val="630"/>
+              </a:spcAft>
+            </a:pPr>
+            <a:r>
+              <a:rPr sz="1400" b="1">
+                <a:solidFill>
+                  <a:srgbClr val="F4B183"/>
+                </a:solidFill>
+                <a:latin typeface="Nunito Sans"/>
+              </a:rPr>
               <a:t>AHORA, LA HOJA DEL DÍA</a:t>
             </a:r>
           </a:p>
@@ -6381,7 +6136,7 @@
                 </a:solidFill>
                 <a:latin typeface="Nunito Sans"/>
               </a:rPr>
-              <a:t>Ante una diferencia en los datos, no hay que saltar a la primera explicación: hay que preguntar ______.  (sesión 82)</a:t>
+              <a:t>Decir que los migrantes son «todos buenísimos» también es una generalización ______.  (sesión 82)</a:t>
             </a:r>
           </a:p>
           <a:p>
@@ -6406,7 +6161,7 @@
                 </a:solidFill>
                 <a:latin typeface="Nunito Sans"/>
               </a:rPr>
-              <a:t>Según el INE, de media las mujeres cobran ______ al año que los hombres.  (sesión 82)</a:t>
+              <a:t>Emigrar es salir del lugar donde vivías; ______ es llegar a vivir a un lugar nuevo.  (sesión 82)</a:t>
             </a:r>
           </a:p>
           <a:p>
@@ -6583,7 +6338,7 @@
                 </a:solidFill>
                 <a:latin typeface="Nunito Sans"/>
               </a:rPr>
-              <a:t>Ante una diferencia en los datos, no hay que saltar a la primera explicación: hay que preguntar </a:t>
+              <a:t>Decir que los migrantes son «todos buenísimos» también es una generalización </a:t>
             </a:r>
             <a:r>
               <a:rPr sz="2600" b="1">
@@ -6592,7 +6347,7 @@
                 </a:solidFill>
                 <a:latin typeface="Nunito Sans"/>
               </a:rPr>
-              <a:t>por qué</a:t>
+              <a:t>apresurada</a:t>
             </a:r>
             <a:r>
               <a:rPr sz="2600" b="0">
@@ -6626,7 +6381,7 @@
                 </a:solidFill>
                 <a:latin typeface="Nunito Sans"/>
               </a:rPr>
-              <a:t>Según el INE, de media las mujeres cobran </a:t>
+              <a:t>Emigrar es salir del lugar donde vivías; </a:t>
             </a:r>
             <a:r>
               <a:rPr sz="2600" b="1">
@@ -6635,7 +6390,7 @@
                 </a:solidFill>
                 <a:latin typeface="Nunito Sans"/>
               </a:rPr>
-              <a:t>menos</a:t>
+              <a:t>inmigrar</a:t>
             </a:r>
             <a:r>
               <a:rPr sz="2600" b="0">
@@ -6644,7 +6399,7 @@
                 </a:solidFill>
                 <a:latin typeface="Nunito Sans"/>
               </a:rPr>
-              <a:t> al año que los hombres.  (sesión 82)</a:t>
+              <a:t> es llegar a vivir a un lugar nuevo.  (sesión 82)</a:t>
             </a:r>
           </a:p>
           <a:p>
@@ -6834,7 +6589,7 @@
                 </a:solidFill>
                 <a:latin typeface="Nunito Sans"/>
               </a:rPr>
-              <a:t>En el vestuario, después de fallar un pase, alguien grita: «¡Qué gay eres!». Todos se ríen.</a:t>
+              <a:t>Dos personas preguntan por una calle en Gran Vía. Una lleva traje y maletín. La otra, ropa vieja y una mochila enorme. Casi todos atienden solo a la primera.</a:t>
             </a:r>
           </a:p>
         </p:txBody>
@@ -6873,7 +6628,7 @@
                 </a:solidFill>
                 <a:latin typeface="Nunito Sans"/>
               </a:rPr>
-              <a:t>¿Por qué funciona esa frase como insulto? ¿Qué dice sin decirlo?</a:t>
+              <a:t>¿Qué ven los que pasan de largo?</a:t>
             </a:r>
           </a:p>
         </p:txBody>
@@ -6977,7 +6732,7 @@
                 </a:solidFill>
                 <a:latin typeface="Fredoka"/>
               </a:rPr>
-              <a:t>Palabras claras</a:t>
+              <a:t>Cómo funciona un prejuicio</a:t>
             </a:r>
           </a:p>
         </p:txBody>
@@ -7042,7 +6797,7 @@
                 </a:solidFill>
                 <a:latin typeface="Nunito Sans"/>
               </a:rPr>
-              <a:t>BLOQUE 1 · PALABRAS CLARAS</a:t>
+              <a:t>BLOQUE 1 · CÓMO FUNCIONA UN PREJUICIO</a:t>
             </a:r>
           </a:p>
         </p:txBody>
@@ -7081,7 +6836,7 @@
                 </a:solidFill>
                 <a:latin typeface="Fredoka"/>
               </a:rPr>
-              <a:t>Orientación sexual</a:t>
+              <a:t>Prejuicio</a:t>
             </a:r>
           </a:p>
         </p:txBody>
@@ -7163,7 +6918,7 @@
                 </a:solidFill>
                 <a:latin typeface="Nunito Sans"/>
               </a:rPr>
-              <a:t>Es hacia quién siente una persona atracción y amor.</a:t>
+              <a:t>Es juzgar a una persona antes de conocerla, solo por el grupo al que pertenece.</a:t>
             </a:r>
           </a:p>
         </p:txBody>
@@ -7205,13 +6960,22 @@
               <a:t>• </a:t>
             </a:r>
             <a:r>
+              <a:rPr sz="2800" b="0">
+                <a:solidFill>
+                  <a:srgbClr val="1F2A44"/>
+                </a:solidFill>
+                <a:latin typeface="Nunito Sans"/>
+              </a:rPr>
+              <a:t>Pre-juicio: un juicio </a:t>
+            </a:r>
+            <a:r>
               <a:rPr sz="2800" b="1">
                 <a:solidFill>
                   <a:srgbClr val="1F2A44"/>
                 </a:solidFill>
                 <a:latin typeface="Nunito Sans"/>
               </a:rPr>
-              <a:t>Heterosexual:</a:t>
+              <a:t>antes</a:t>
             </a:r>
             <a:r>
               <a:rPr sz="2800" b="0">
@@ -7220,7 +6984,7 @@
                 </a:solidFill>
                 <a:latin typeface="Nunito Sans"/>
               </a:rPr>
-              <a:t> hacia personas del otro sexo</a:t>
+              <a:t> de conocer</a:t>
             </a:r>
           </a:p>
           <a:p>
@@ -7239,22 +7003,13 @@
               <a:t>• </a:t>
             </a:r>
             <a:r>
-              <a:rPr sz="2800" b="1">
+              <a:rPr sz="2800" b="0">
                 <a:solidFill>
                   <a:srgbClr val="1F2A44"/>
                 </a:solidFill>
                 <a:latin typeface="Nunito Sans"/>
               </a:rPr>
-              <a:t>Homosexual</a:t>
-            </a:r>
-            <a:r>
-              <a:rPr sz="2800" b="0">
-                <a:solidFill>
-                  <a:srgbClr val="1F2A44"/>
-                </a:solidFill>
-                <a:latin typeface="Nunito Sans"/>
-              </a:rPr>
-              <a:t> (gay o lesbiana): hacia personas del mismo sexo</a:t>
+              <a:t>Suele ser negativo y cuesta mucho cambiarlo</a:t>
             </a:r>
           </a:p>
           <a:p>
@@ -7273,56 +7028,13 @@
               <a:t>• </a:t>
             </a:r>
             <a:r>
-              <a:rPr sz="2800" b="1">
+              <a:rPr sz="2800" b="0">
                 <a:solidFill>
                   <a:srgbClr val="1F2A44"/>
                 </a:solidFill>
                 <a:latin typeface="Nunito Sans"/>
               </a:rPr>
-              <a:t>Bisexual:</a:t>
-            </a:r>
-            <a:r>
-              <a:rPr sz="2800" b="0">
-                <a:solidFill>
-                  <a:srgbClr val="1F2A44"/>
-                </a:solidFill>
-                <a:latin typeface="Nunito Sans"/>
-              </a:rPr>
-              <a:t> hacia personas de más de un sexo</a:t>
-            </a:r>
-          </a:p>
-          <a:p>
-            <a:pPr>
-              <a:spcAft>
-                <a:spcPts val="1260"/>
-              </a:spcAft>
-            </a:pPr>
-            <a:r>
-              <a:rPr sz="2800" b="1">
-                <a:solidFill>
-                  <a:srgbClr val="E8793A"/>
-                </a:solidFill>
-                <a:latin typeface="Nunito Sans"/>
-              </a:rPr>
-              <a:t>• </a:t>
-            </a:r>
-            <a:r>
-              <a:rPr sz="2800" b="0">
-                <a:solidFill>
-                  <a:srgbClr val="1F2A44"/>
-                </a:solidFill>
-                <a:latin typeface="Nunito Sans"/>
-              </a:rPr>
-              <a:t>No se elige como un gusto y </a:t>
-            </a:r>
-            <a:r>
-              <a:rPr sz="2800" b="1">
-                <a:solidFill>
-                  <a:srgbClr val="1F2A44"/>
-                </a:solidFill>
-                <a:latin typeface="Nunito Sans"/>
-              </a:rPr>
-              <a:t>no es una enfermedad</a:t>
+              <a:t>Se aprende: nadie nace con prejuicios</a:t>
             </a:r>
           </a:p>
         </p:txBody>
@@ -7387,7 +7099,7 @@
                 </a:solidFill>
                 <a:latin typeface="Nunito Sans"/>
               </a:rPr>
-              <a:t>BLOQUE 1 · PALABRAS CLARAS</a:t>
+              <a:t>BLOQUE 1 · CÓMO FUNCIONA UN PREJUICIO</a:t>
             </a:r>
           </a:p>
         </p:txBody>
@@ -7426,218 +7138,319 @@
                 </a:solidFill>
                 <a:latin typeface="Fredoka"/>
               </a:rPr>
-              <a:t>Identidad de género</a:t>
-            </a:r>
-          </a:p>
-        </p:txBody>
-      </p:sp>
-      <p:sp>
-        <p:nvSpPr>
-          <p:cNvPr id="4" name="Rectangle 3"/>
-          <p:cNvSpPr/>
+              <a:t>De la idea al acto</a:t>
+            </a:r>
+          </a:p>
+        </p:txBody>
+      </p:sp>
+      <p:graphicFrame>
+        <p:nvGraphicFramePr>
+          <p:cNvPr id="4" name="Table 3"/>
+          <p:cNvGraphicFramePr>
+            <a:graphicFrameLocks noGrp="1"/>
+          </p:cNvGraphicFramePr>
           <p:nvPr/>
-        </p:nvSpPr>
-        <p:spPr>
-          <a:xfrm>
-            <a:off x="640000" y="1650000"/>
-            <a:ext cx="10912000" cy="1150000"/>
-          </a:xfrm>
-          <a:prstGeom prst="rect">
-            <a:avLst/>
-          </a:prstGeom>
-          <a:solidFill>
-            <a:srgbClr val="EAF0F7"/>
-          </a:solidFill>
-          <a:ln>
-            <a:noFill/>
-          </a:ln>
-        </p:spPr>
-        <p:style>
-          <a:lnRef idx="1">
-            <a:schemeClr val="accent1"/>
-          </a:lnRef>
-          <a:fillRef idx="3">
-            <a:schemeClr val="accent1"/>
-          </a:fillRef>
-          <a:effectRef idx="2">
-            <a:schemeClr val="accent1"/>
-          </a:effectRef>
-          <a:fontRef idx="minor">
-            <a:schemeClr val="lt1"/>
-          </a:fontRef>
-        </p:style>
-        <p:txBody>
-          <a:bodyPr rtlCol="0" anchor="ctr"/>
-          <a:lstStyle/>
-          <a:p>
-            <a:pPr algn="ctr"/>
-          </a:p>
-        </p:txBody>
-      </p:sp>
-      <p:sp>
-        <p:nvSpPr>
-          <p:cNvPr id="5" name="TextBox 4"/>
-          <p:cNvSpPr txBox="1"/>
-          <p:nvPr/>
-        </p:nvSpPr>
-        <p:spPr>
-          <a:xfrm>
-            <a:off x="840000" y="1730000"/>
-            <a:ext cx="10512000" cy="1000000"/>
-          </a:xfrm>
-          <a:prstGeom prst="rect">
-            <a:avLst/>
-          </a:prstGeom>
-          <a:noFill/>
-        </p:spPr>
-        <p:txBody>
-          <a:bodyPr wrap="square" anchor="ctr">
-            <a:spAutoFit/>
-          </a:bodyPr>
-          <a:lstStyle/>
-          <a:p>
-            <a:pPr>
-              <a:spcAft>
-                <a:spcPts val="1260"/>
-              </a:spcAft>
-            </a:pPr>
-            <a:r>
-              <a:rPr sz="2800" b="1">
-                <a:solidFill>
-                  <a:srgbClr val="1F2A44"/>
-                </a:solidFill>
-                <a:latin typeface="Nunito Sans"/>
-              </a:rPr>
-              <a:t>Es cómo se siente y se reconoce una persona: hombre, mujer u otra forma.</a:t>
-            </a:r>
-          </a:p>
-        </p:txBody>
-      </p:sp>
-      <p:sp>
-        <p:nvSpPr>
-          <p:cNvPr id="6" name="TextBox 5"/>
-          <p:cNvSpPr txBox="1"/>
-          <p:nvPr/>
-        </p:nvSpPr>
-        <p:spPr>
-          <a:xfrm>
-            <a:off x="640000" y="3000000"/>
-            <a:ext cx="10912000" cy="3458000"/>
-          </a:xfrm>
-          <a:prstGeom prst="rect">
-            <a:avLst/>
-          </a:prstGeom>
-          <a:noFill/>
-        </p:spPr>
-        <p:txBody>
-          <a:bodyPr wrap="square">
-            <a:spAutoFit/>
-          </a:bodyPr>
-          <a:lstStyle/>
-          <a:p>
-            <a:pPr>
-              <a:spcAft>
-                <a:spcPts val="1260"/>
-              </a:spcAft>
-            </a:pPr>
-            <a:r>
-              <a:rPr sz="2800" b="1">
-                <a:solidFill>
-                  <a:srgbClr val="E8793A"/>
-                </a:solidFill>
-                <a:latin typeface="Nunito Sans"/>
-              </a:rPr>
-              <a:t>• </a:t>
-            </a:r>
-            <a:r>
-              <a:rPr sz="2800" b="1">
-                <a:solidFill>
-                  <a:srgbClr val="1F2A44"/>
-                </a:solidFill>
-                <a:latin typeface="Nunito Sans"/>
-              </a:rPr>
-              <a:t>Persona cis:</a:t>
-            </a:r>
-            <a:r>
-              <a:rPr sz="2800" b="0">
-                <a:solidFill>
-                  <a:srgbClr val="1F2A44"/>
-                </a:solidFill>
-                <a:latin typeface="Nunito Sans"/>
-              </a:rPr>
-              <a:t> su identidad coincide con el sexo asignado al nacer</a:t>
-            </a:r>
-          </a:p>
-          <a:p>
-            <a:pPr>
-              <a:spcAft>
-                <a:spcPts val="1260"/>
-              </a:spcAft>
-            </a:pPr>
-            <a:r>
-              <a:rPr sz="2800" b="1">
-                <a:solidFill>
-                  <a:srgbClr val="E8793A"/>
-                </a:solidFill>
-                <a:latin typeface="Nunito Sans"/>
-              </a:rPr>
-              <a:t>• </a:t>
-            </a:r>
-            <a:r>
-              <a:rPr sz="2800" b="1">
-                <a:solidFill>
-                  <a:srgbClr val="1F2A44"/>
-                </a:solidFill>
-                <a:latin typeface="Nunito Sans"/>
-              </a:rPr>
-              <a:t>Persona trans:</a:t>
-            </a:r>
-            <a:r>
-              <a:rPr sz="2800" b="0">
-                <a:solidFill>
-                  <a:srgbClr val="1F2A44"/>
-                </a:solidFill>
-                <a:latin typeface="Nunito Sans"/>
-              </a:rPr>
-              <a:t> su identidad no coincide con el sexo asignado al nacer</a:t>
-            </a:r>
-          </a:p>
-          <a:p>
-            <a:pPr>
-              <a:spcAft>
-                <a:spcPts val="1260"/>
-              </a:spcAft>
-            </a:pPr>
-            <a:r>
-              <a:rPr sz="2800" b="1">
-                <a:solidFill>
-                  <a:srgbClr val="E8793A"/>
-                </a:solidFill>
-                <a:latin typeface="Nunito Sans"/>
-              </a:rPr>
-              <a:t>• </a:t>
-            </a:r>
-            <a:r>
-              <a:rPr sz="2800" b="0">
-                <a:solidFill>
-                  <a:srgbClr val="1F2A44"/>
-                </a:solidFill>
-                <a:latin typeface="Nunito Sans"/>
-              </a:rPr>
-              <a:t>Orientación e identidad son </a:t>
-            </a:r>
-            <a:r>
-              <a:rPr sz="2800" b="1">
-                <a:solidFill>
-                  <a:srgbClr val="1F2A44"/>
-                </a:solidFill>
-                <a:latin typeface="Nunito Sans"/>
-              </a:rPr>
-              <a:t>cosas distintas</a:t>
-            </a:r>
-          </a:p>
-        </p:txBody>
-      </p:sp>
+        </p:nvGraphicFramePr>
+        <p:xfrm>
+          <a:off x="640000" y="1700000"/>
+          <a:ext cx="10912000" cy="2400000"/>
+        </p:xfrm>
+        <a:graphic>
+          <a:graphicData uri="http://schemas.openxmlformats.org/drawingml/2006/table">
+            <a:tbl>
+              <a:tblPr firstRow="1" bandRow="1">
+                <a:tableStyleId>{5C22544A-7EE6-4342-B048-85BDC9FD1C3A}</a:tableStyleId>
+              </a:tblPr>
+              <a:tblGrid>
+                <a:gridCol w="3637333"/>
+                <a:gridCol w="3637333"/>
+                <a:gridCol w="3637334"/>
+              </a:tblGrid>
+              <a:tr h="600000">
+                <a:tc>
+                  <a:txBody>
+                    <a:bodyPr/>
+                    <a:lstStyle/>
+                    <a:p>
+                      <a:r>
+                        <a:rPr sz="2000" b="1">
+                          <a:solidFill>
+                            <a:srgbClr val="FBF7EF"/>
+                          </a:solidFill>
+                          <a:latin typeface="Fredoka"/>
+                        </a:rPr>
+                        <a:t>Paso</a:t>
+                      </a:r>
+                    </a:p>
+                  </a:txBody>
+                  <a:tcPr>
+                    <a:solidFill>
+                      <a:srgbClr val="1F2A44"/>
+                    </a:solidFill>
+                  </a:tcPr>
+                </a:tc>
+                <a:tc>
+                  <a:txBody>
+                    <a:bodyPr/>
+                    <a:lstStyle/>
+                    <a:p>
+                      <a:r>
+                        <a:rPr sz="2000" b="1">
+                          <a:solidFill>
+                            <a:srgbClr val="FBF7EF"/>
+                          </a:solidFill>
+                          <a:latin typeface="Fredoka"/>
+                        </a:rPr>
+                        <a:t>Qué es</a:t>
+                      </a:r>
+                    </a:p>
+                  </a:txBody>
+                  <a:tcPr>
+                    <a:solidFill>
+                      <a:srgbClr val="1F2A44"/>
+                    </a:solidFill>
+                  </a:tcPr>
+                </a:tc>
+                <a:tc>
+                  <a:txBody>
+                    <a:bodyPr/>
+                    <a:lstStyle/>
+                    <a:p>
+                      <a:r>
+                        <a:rPr sz="2000" b="1">
+                          <a:solidFill>
+                            <a:srgbClr val="FBF7EF"/>
+                          </a:solidFill>
+                          <a:latin typeface="Fredoka"/>
+                        </a:rPr>
+                        <a:t>Ejemplo inventado</a:t>
+                      </a:r>
+                    </a:p>
+                  </a:txBody>
+                  <a:tcPr>
+                    <a:solidFill>
+                      <a:srgbClr val="1F2A44"/>
+                    </a:solidFill>
+                  </a:tcPr>
+                </a:tc>
+              </a:tr>
+              <a:tr h="600000">
+                <a:tc>
+                  <a:txBody>
+                    <a:bodyPr/>
+                    <a:lstStyle/>
+                    <a:p>
+                      <a:r>
+                        <a:rPr sz="2000" b="1">
+                          <a:solidFill>
+                            <a:srgbClr val="1F2A44"/>
+                          </a:solidFill>
+                          <a:latin typeface="Nunito Sans"/>
+                        </a:rPr>
+                        <a:t>Estereotipo</a:t>
+                      </a:r>
+                      <a:r>
+                        <a:rPr sz="2000" b="0">
+                          <a:solidFill>
+                            <a:srgbClr val="1F2A44"/>
+                          </a:solidFill>
+                          <a:latin typeface="Nunito Sans"/>
+                        </a:rPr>
+                        <a:t> (sesión 46)</a:t>
+                      </a:r>
+                    </a:p>
+                  </a:txBody>
+                  <a:tcPr>
+                    <a:solidFill>
+                      <a:srgbClr val="FFFFFF"/>
+                    </a:solidFill>
+                  </a:tcPr>
+                </a:tc>
+                <a:tc>
+                  <a:txBody>
+                    <a:bodyPr/>
+                    <a:lstStyle/>
+                    <a:p>
+                      <a:r>
+                        <a:rPr sz="2000" b="0">
+                          <a:solidFill>
+                            <a:srgbClr val="1F2A44"/>
+                          </a:solidFill>
+                          <a:latin typeface="Nunito Sans"/>
+                        </a:rPr>
+                        <a:t>Una idea fija sobre un grupo</a:t>
+                      </a:r>
+                    </a:p>
+                  </a:txBody>
+                  <a:tcPr>
+                    <a:solidFill>
+                      <a:srgbClr val="FFFFFF"/>
+                    </a:solidFill>
+                  </a:tcPr>
+                </a:tc>
+                <a:tc>
+                  <a:txBody>
+                    <a:bodyPr/>
+                    <a:lstStyle/>
+                    <a:p>
+                      <a:r>
+                        <a:rPr sz="2000" b="0">
+                          <a:solidFill>
+                            <a:srgbClr val="1F2A44"/>
+                          </a:solidFill>
+                          <a:latin typeface="Nunito Sans"/>
+                        </a:rPr>
+                        <a:t>«Los de ese barrio son conflictivos»</a:t>
+                      </a:r>
+                    </a:p>
+                  </a:txBody>
+                  <a:tcPr>
+                    <a:solidFill>
+                      <a:srgbClr val="FFFFFF"/>
+                    </a:solidFill>
+                  </a:tcPr>
+                </a:tc>
+              </a:tr>
+              <a:tr h="600000">
+                <a:tc>
+                  <a:txBody>
+                    <a:bodyPr/>
+                    <a:lstStyle/>
+                    <a:p>
+                      <a:r>
+                        <a:rPr sz="2000" b="1">
+                          <a:solidFill>
+                            <a:srgbClr val="1F2A44"/>
+                          </a:solidFill>
+                          <a:latin typeface="Nunito Sans"/>
+                        </a:rPr>
+                        <a:t>Prejuicio</a:t>
+                      </a:r>
+                    </a:p>
+                  </a:txBody>
+                  <a:tcPr>
+                    <a:solidFill>
+                      <a:srgbClr val="EAF0F7"/>
+                    </a:solidFill>
+                  </a:tcPr>
+                </a:tc>
+                <a:tc>
+                  <a:txBody>
+                    <a:bodyPr/>
+                    <a:lstStyle/>
+                    <a:p>
+                      <a:r>
+                        <a:rPr sz="2000" b="0">
+                          <a:solidFill>
+                            <a:srgbClr val="1F2A44"/>
+                          </a:solidFill>
+                          <a:latin typeface="Nunito Sans"/>
+                        </a:rPr>
+                        <a:t>Un juicio o rechazo antes de conocer</a:t>
+                      </a:r>
+                    </a:p>
+                  </a:txBody>
+                  <a:tcPr>
+                    <a:solidFill>
+                      <a:srgbClr val="EAF0F7"/>
+                    </a:solidFill>
+                  </a:tcPr>
+                </a:tc>
+                <a:tc>
+                  <a:txBody>
+                    <a:bodyPr/>
+                    <a:lstStyle/>
+                    <a:p>
+                      <a:r>
+                        <a:rPr sz="2000" b="0">
+                          <a:solidFill>
+                            <a:srgbClr val="1F2A44"/>
+                          </a:solidFill>
+                          <a:latin typeface="Nunito Sans"/>
+                        </a:rPr>
+                        <a:t>«Seguro que el nuevo es conflictivo»</a:t>
+                      </a:r>
+                    </a:p>
+                  </a:txBody>
+                  <a:tcPr>
+                    <a:solidFill>
+                      <a:srgbClr val="EAF0F7"/>
+                    </a:solidFill>
+                  </a:tcPr>
+                </a:tc>
+              </a:tr>
+              <a:tr h="600000">
+                <a:tc>
+                  <a:txBody>
+                    <a:bodyPr/>
+                    <a:lstStyle/>
+                    <a:p>
+                      <a:r>
+                        <a:rPr sz="2000" b="1">
+                          <a:solidFill>
+                            <a:srgbClr val="1F2A44"/>
+                          </a:solidFill>
+                          <a:latin typeface="Nunito Sans"/>
+                        </a:rPr>
+                        <a:t>Discriminación</a:t>
+                      </a:r>
+                    </a:p>
+                  </a:txBody>
+                  <a:tcPr>
+                    <a:solidFill>
+                      <a:srgbClr val="FFFFFF"/>
+                    </a:solidFill>
+                  </a:tcPr>
+                </a:tc>
+                <a:tc>
+                  <a:txBody>
+                    <a:bodyPr/>
+                    <a:lstStyle/>
+                    <a:p>
+                      <a:r>
+                        <a:rPr sz="2000" b="0">
+                          <a:solidFill>
+                            <a:srgbClr val="1F2A44"/>
+                          </a:solidFill>
+                          <a:latin typeface="Nunito Sans"/>
+                        </a:rPr>
+                        <a:t>Tratar peor a alguien por su grupo</a:t>
+                      </a:r>
+                    </a:p>
+                  </a:txBody>
+                  <a:tcPr>
+                    <a:solidFill>
+                      <a:srgbClr val="FFFFFF"/>
+                    </a:solidFill>
+                  </a:tcPr>
+                </a:tc>
+                <a:tc>
+                  <a:txBody>
+                    <a:bodyPr/>
+                    <a:lstStyle/>
+                    <a:p>
+                      <a:r>
+                        <a:rPr sz="2000" b="0">
+                          <a:solidFill>
+                            <a:srgbClr val="1F2A44"/>
+                          </a:solidFill>
+                          <a:latin typeface="Nunito Sans"/>
+                        </a:rPr>
+                        <a:t>No dejarle entrar en el equipo</a:t>
+                      </a:r>
+                    </a:p>
+                  </a:txBody>
+                  <a:tcPr>
+                    <a:solidFill>
+                      <a:srgbClr val="FFFFFF"/>
+                    </a:solidFill>
+                  </a:tcPr>
+                </a:tc>
+              </a:tr>
+            </a:tbl>
+          </a:graphicData>
+        </a:graphic>
+      </p:graphicFrame>
     </p:spTree>
   </p:cSld>
   <p:clrMapOvr>
@@ -7698,7 +7511,7 @@
                 </a:solidFill>
                 <a:latin typeface="Nunito Sans"/>
               </a:rPr>
-              <a:t>BLOQUE 1 · PALABRAS CLARAS</a:t>
+              <a:t>BLOQUE 1 · CÓMO FUNCIONA UN PREJUICIO</a:t>
             </a:r>
           </a:p>
         </p:txBody>
@@ -7737,7 +7550,7 @@
                 </a:solidFill>
                 <a:latin typeface="Fredoka"/>
               </a:rPr>
-              <a:t>Consentimiento</a:t>
+              <a:t>Aporofobia</a:t>
             </a:r>
           </a:p>
         </p:txBody>
@@ -7819,25 +7632,7 @@
                 </a:solidFill>
                 <a:latin typeface="Nunito Sans"/>
               </a:rPr>
-              <a:t>Es estar de acuerdo con algo de forma libre y clara. En las relaciones, </a:t>
-            </a:r>
-            <a:r>
-              <a:rPr sz="2800" b="1">
-                <a:solidFill>
-                  <a:srgbClr val="1F2A44"/>
-                </a:solidFill>
-                <a:latin typeface="Nunito Sans"/>
-              </a:rPr>
-              <a:t>solo sí es sí</a:t>
-            </a:r>
-            <a:r>
-              <a:rPr sz="2800" b="1">
-                <a:solidFill>
-                  <a:srgbClr val="1F2A44"/>
-                </a:solidFill>
-                <a:latin typeface="Nunito Sans"/>
-              </a:rPr>
-              <a:t>.</a:t>
+              <a:t>Es el rechazo a las personas pobres, solo por ser pobres.</a:t>
             </a:r>
           </a:p>
         </p:txBody>
@@ -7885,7 +7680,7 @@
                 </a:solidFill>
                 <a:latin typeface="Nunito Sans"/>
               </a:rPr>
-              <a:t>Callarse o no decir «no» </a:t>
+              <a:t>Palabra creada por la filósofa </a:t>
             </a:r>
             <a:r>
               <a:rPr sz="2800" b="1">
@@ -7894,16 +7689,7 @@
                 </a:solidFill>
                 <a:latin typeface="Nunito Sans"/>
               </a:rPr>
-              <a:t>no</a:t>
-            </a:r>
-            <a:r>
-              <a:rPr sz="2800" b="0">
-                <a:solidFill>
-                  <a:srgbClr val="1F2A44"/>
-                </a:solidFill>
-                <a:latin typeface="Nunito Sans"/>
-              </a:rPr>
-              <a:t> es un sí</a:t>
+              <a:t>Adela Cortina</a:t>
             </a:r>
           </a:p>
           <a:p>
@@ -7928,7 +7714,7 @@
                 </a:solidFill>
                 <a:latin typeface="Nunito Sans"/>
               </a:rPr>
-              <a:t>Con presión, miedo o engaño no hay acuerdo </a:t>
+              <a:t>La RAE la aceptó en el diccionario en </a:t>
             </a:r>
             <a:r>
               <a:rPr sz="2800" b="1">
@@ -7937,7 +7723,7 @@
                 </a:solidFill>
                 <a:latin typeface="Nunito Sans"/>
               </a:rPr>
-              <a:t>libre</a:t>
+              <a:t>2017</a:t>
             </a:r>
           </a:p>
           <a:p>
@@ -7962,7 +7748,7 @@
                 </a:solidFill>
                 <a:latin typeface="Nunito Sans"/>
               </a:rPr>
-              <a:t>Se puede </a:t>
+              <a:t>Su idea: a menudo no molesta el de fuera, sino el </a:t>
             </a:r>
             <a:r>
               <a:rPr sz="2800" b="1">
@@ -7971,50 +7757,7 @@
                 </a:solidFill>
                 <a:latin typeface="Nunito Sans"/>
               </a:rPr>
-              <a:t>cambiar de opinión</a:t>
-            </a:r>
-            <a:r>
-              <a:rPr sz="2800" b="0">
-                <a:solidFill>
-                  <a:srgbClr val="1F2A44"/>
-                </a:solidFill>
-                <a:latin typeface="Nunito Sans"/>
-              </a:rPr>
-              <a:t> en cualquier momento</a:t>
-            </a:r>
-          </a:p>
-          <a:p>
-            <a:pPr>
-              <a:spcAft>
-                <a:spcPts val="1260"/>
-              </a:spcAft>
-            </a:pPr>
-            <a:r>
-              <a:rPr sz="2800" b="1">
-                <a:solidFill>
-                  <a:srgbClr val="E8793A"/>
-                </a:solidFill>
-                <a:latin typeface="Nunito Sans"/>
-              </a:rPr>
-              <a:t>• </a:t>
-            </a:r>
-            <a:r>
-              <a:rPr sz="2800" b="0">
-                <a:solidFill>
-                  <a:srgbClr val="1F2A44"/>
-                </a:solidFill>
-                <a:latin typeface="Nunito Sans"/>
-              </a:rPr>
-              <a:t>Vale para un beso, un abrazo o </a:t>
-            </a:r>
-            <a:r>
-              <a:rPr sz="2800" b="1">
-                <a:solidFill>
-                  <a:srgbClr val="1F2A44"/>
-                </a:solidFill>
-                <a:latin typeface="Nunito Sans"/>
-              </a:rPr>
-              <a:t>una foto</a:t>
+              <a:t>pobre</a:t>
             </a:r>
           </a:p>
         </p:txBody>
@@ -8079,7 +7822,7 @@
                 </a:solidFill>
                 <a:latin typeface="Nunito Sans"/>
               </a:rPr>
-              <a:t>BLOQUE 1 · PALABRAS CLARAS</a:t>
+              <a:t>BLOQUE 1 · CÓMO FUNCIONA UN PREJUICIO</a:t>
             </a:r>
           </a:p>
         </p:txBody>
@@ -8118,234 +7861,267 @@
                 </a:solidFill>
                 <a:latin typeface="Fredoka"/>
               </a:rPr>
-              <a:t>Caso 1 · La foto</a:t>
-            </a:r>
-          </a:p>
-        </p:txBody>
-      </p:sp>
-      <p:sp>
-        <p:nvSpPr>
-          <p:cNvPr id="4" name="Rectangle 3"/>
-          <p:cNvSpPr/>
+              <a:t>Otras exclusiones</a:t>
+            </a:r>
+          </a:p>
+        </p:txBody>
+      </p:sp>
+      <p:graphicFrame>
+        <p:nvGraphicFramePr>
+          <p:cNvPr id="4" name="Table 3"/>
+          <p:cNvGraphicFramePr>
+            <a:graphicFrameLocks noGrp="1"/>
+          </p:cNvGraphicFramePr>
           <p:nvPr/>
-        </p:nvSpPr>
-        <p:spPr>
-          <a:xfrm>
-            <a:off x="640000" y="1600000"/>
-            <a:ext cx="10912000" cy="1100000"/>
-          </a:xfrm>
-          <a:prstGeom prst="rect">
-            <a:avLst/>
-          </a:prstGeom>
-          <a:solidFill>
-            <a:srgbClr val="FFFFFF"/>
-          </a:solidFill>
-          <a:ln>
-            <a:noFill/>
-          </a:ln>
-        </p:spPr>
-        <p:style>
-          <a:lnRef idx="1">
-            <a:schemeClr val="accent1"/>
-          </a:lnRef>
-          <a:fillRef idx="3">
-            <a:schemeClr val="accent1"/>
-          </a:fillRef>
-          <a:effectRef idx="2">
-            <a:schemeClr val="accent1"/>
-          </a:effectRef>
-          <a:fontRef idx="minor">
-            <a:schemeClr val="lt1"/>
-          </a:fontRef>
-        </p:style>
-        <p:txBody>
-          <a:bodyPr rtlCol="0" anchor="ctr"/>
-          <a:lstStyle/>
-          <a:p>
-            <a:pPr algn="ctr"/>
-          </a:p>
-        </p:txBody>
-      </p:sp>
-      <p:sp>
-        <p:nvSpPr>
-          <p:cNvPr id="5" name="TextBox 4"/>
-          <p:cNvSpPr txBox="1"/>
-          <p:nvPr/>
-        </p:nvSpPr>
-        <p:spPr>
-          <a:xfrm>
-            <a:off x="840000" y="1650000"/>
-            <a:ext cx="10512000" cy="1000000"/>
-          </a:xfrm>
-          <a:prstGeom prst="rect">
-            <a:avLst/>
-          </a:prstGeom>
-          <a:noFill/>
-        </p:spPr>
-        <p:txBody>
-          <a:bodyPr wrap="square" anchor="ctr">
-            <a:spAutoFit/>
-          </a:bodyPr>
-          <a:lstStyle/>
-          <a:p>
-            <a:pPr>
-              <a:spcAft>
-                <a:spcPts val="1170"/>
-              </a:spcAft>
-            </a:pPr>
-            <a:r>
-              <a:rPr sz="2600" b="1">
-                <a:solidFill>
-                  <a:srgbClr val="1F2A44"/>
-                </a:solidFill>
-                <a:latin typeface="Nunito Sans"/>
-              </a:rPr>
-              <a:t>Una chica le envió una foto privada a un chico cuando salían juntos. Ahora lo han dejado y él quiere reenviarla al grupo de la cuadrilla.</a:t>
-            </a:r>
-          </a:p>
-        </p:txBody>
-      </p:sp>
-      <p:sp>
-        <p:nvSpPr>
-          <p:cNvPr id="6" name="TextBox 5"/>
-          <p:cNvSpPr txBox="1"/>
-          <p:nvPr/>
-        </p:nvSpPr>
-        <p:spPr>
-          <a:xfrm>
-            <a:off x="640000" y="2900000"/>
-            <a:ext cx="10912000" cy="3500000"/>
-          </a:xfrm>
-          <a:prstGeom prst="rect">
-            <a:avLst/>
-          </a:prstGeom>
-          <a:noFill/>
-        </p:spPr>
-        <p:txBody>
-          <a:bodyPr wrap="square">
-            <a:spAutoFit/>
-          </a:bodyPr>
-          <a:lstStyle/>
-          <a:p>
-            <a:pPr>
-              <a:spcAft>
-                <a:spcPts val="1080"/>
-              </a:spcAft>
-            </a:pPr>
-            <a:r>
-              <a:rPr sz="2400" b="1">
-                <a:solidFill>
-                  <a:srgbClr val="E8793A"/>
-                </a:solidFill>
-                <a:latin typeface="Nunito Sans"/>
-              </a:rPr>
-              <a:t>1. </a:t>
-            </a:r>
-            <a:r>
-              <a:rPr sz="2400" b="0">
-                <a:solidFill>
-                  <a:srgbClr val="1F2A44"/>
-                </a:solidFill>
-                <a:latin typeface="Nunito Sans"/>
-              </a:rPr>
-              <a:t>¿Dio ella permiso para que la vieran otros? No: la envió solo a él.</a:t>
-            </a:r>
-          </a:p>
-          <a:p>
-            <a:pPr>
-              <a:spcAft>
-                <a:spcPts val="1080"/>
-              </a:spcAft>
-            </a:pPr>
-            <a:r>
-              <a:rPr sz="2400" b="1">
-                <a:solidFill>
-                  <a:srgbClr val="E8793A"/>
-                </a:solidFill>
-                <a:latin typeface="Nunito Sans"/>
-              </a:rPr>
-              <a:t>2. </a:t>
-            </a:r>
-            <a:r>
-              <a:rPr sz="2400" b="0">
-                <a:solidFill>
-                  <a:srgbClr val="1F2A44"/>
-                </a:solidFill>
-                <a:latin typeface="Nunito Sans"/>
-              </a:rPr>
-              <a:t>El consentimiento es para una cosa concreta. Enviar una foto no es aceptar que se reenvíe.</a:t>
-            </a:r>
-          </a:p>
-          <a:p>
-            <a:pPr>
-              <a:spcAft>
-                <a:spcPts val="1080"/>
-              </a:spcAft>
-            </a:pPr>
-            <a:r>
-              <a:rPr sz="2400" b="1">
-                <a:solidFill>
-                  <a:srgbClr val="E8793A"/>
-                </a:solidFill>
-                <a:latin typeface="Nunito Sans"/>
-              </a:rPr>
-              <a:t>3. </a:t>
-            </a:r>
-            <a:r>
-              <a:rPr sz="2400" b="0">
-                <a:solidFill>
-                  <a:srgbClr val="1F2A44"/>
-                </a:solidFill>
-                <a:latin typeface="Nunito Sans"/>
-              </a:rPr>
-              <a:t>Además, difundir imágenes privadas sin permiso puede ser </a:t>
-            </a:r>
-            <a:r>
-              <a:rPr sz="2400" b="1">
-                <a:solidFill>
-                  <a:srgbClr val="1F2A44"/>
-                </a:solidFill>
-                <a:latin typeface="Nunito Sans"/>
-              </a:rPr>
-              <a:t>delito</a:t>
-            </a:r>
-            <a:r>
-              <a:rPr sz="2400" b="0">
-                <a:solidFill>
-                  <a:srgbClr val="1F2A44"/>
-                </a:solidFill>
-                <a:latin typeface="Nunito Sans"/>
-              </a:rPr>
-              <a:t> en España.</a:t>
-            </a:r>
-          </a:p>
-          <a:p>
-            <a:pPr>
-              <a:spcAft>
-                <a:spcPts val="1080"/>
-              </a:spcAft>
-            </a:pPr>
-            <a:r>
-              <a:rPr sz="2400" b="1">
-                <a:solidFill>
-                  <a:srgbClr val="E8793A"/>
-                </a:solidFill>
-                <a:latin typeface="Nunito Sans"/>
-              </a:rPr>
-              <a:t>4. </a:t>
-            </a:r>
-            <a:r>
-              <a:rPr sz="2400" b="0">
-                <a:solidFill>
-                  <a:srgbClr val="1F2A44"/>
-                </a:solidFill>
-                <a:latin typeface="Nunito Sans"/>
-              </a:rPr>
-              <a:t>Conclusión: sin un sí claro de ella, no se reenvía. Y ella puede cambiar de opinión.</a:t>
-            </a:r>
-          </a:p>
-        </p:txBody>
-      </p:sp>
+        </p:nvGraphicFramePr>
+        <p:xfrm>
+          <a:off x="640000" y="1700000"/>
+          <a:ext cx="10912000" cy="3000000"/>
+        </p:xfrm>
+        <a:graphic>
+          <a:graphicData uri="http://schemas.openxmlformats.org/drawingml/2006/table">
+            <a:tbl>
+              <a:tblPr firstRow="1" bandRow="1">
+                <a:tableStyleId>{5C22544A-7EE6-4342-B048-85BDC9FD1C3A}</a:tableStyleId>
+              </a:tblPr>
+              <a:tblGrid>
+                <a:gridCol w="5456000"/>
+                <a:gridCol w="5456000"/>
+              </a:tblGrid>
+              <a:tr h="600000">
+                <a:tc>
+                  <a:txBody>
+                    <a:bodyPr/>
+                    <a:lstStyle/>
+                    <a:p>
+                      <a:r>
+                        <a:rPr sz="2000" b="1">
+                          <a:solidFill>
+                            <a:srgbClr val="FBF7EF"/>
+                          </a:solidFill>
+                          <a:latin typeface="Fredoka"/>
+                        </a:rPr>
+                        <a:t>Palabra</a:t>
+                      </a:r>
+                    </a:p>
+                  </a:txBody>
+                  <a:tcPr>
+                    <a:solidFill>
+                      <a:srgbClr val="1F2A44"/>
+                    </a:solidFill>
+                  </a:tcPr>
+                </a:tc>
+                <a:tc>
+                  <a:txBody>
+                    <a:bodyPr/>
+                    <a:lstStyle/>
+                    <a:p>
+                      <a:r>
+                        <a:rPr sz="2000" b="1">
+                          <a:solidFill>
+                            <a:srgbClr val="FBF7EF"/>
+                          </a:solidFill>
+                          <a:latin typeface="Fredoka"/>
+                        </a:rPr>
+                        <a:t>Rechazo o trato peor a…</a:t>
+                      </a:r>
+                    </a:p>
+                  </a:txBody>
+                  <a:tcPr>
+                    <a:solidFill>
+                      <a:srgbClr val="1F2A44"/>
+                    </a:solidFill>
+                  </a:tcPr>
+                </a:tc>
+              </a:tr>
+              <a:tr h="600000">
+                <a:tc>
+                  <a:txBody>
+                    <a:bodyPr/>
+                    <a:lstStyle/>
+                    <a:p>
+                      <a:r>
+                        <a:rPr sz="2000" b="1">
+                          <a:solidFill>
+                            <a:srgbClr val="1F2A44"/>
+                          </a:solidFill>
+                          <a:latin typeface="Nunito Sans"/>
+                        </a:rPr>
+                        <a:t>Xenofobia</a:t>
+                      </a:r>
+                    </a:p>
+                  </a:txBody>
+                  <a:tcPr>
+                    <a:solidFill>
+                      <a:srgbClr val="FFFFFF"/>
+                    </a:solidFill>
+                  </a:tcPr>
+                </a:tc>
+                <a:tc>
+                  <a:txBody>
+                    <a:bodyPr/>
+                    <a:lstStyle/>
+                    <a:p>
+                      <a:r>
+                        <a:rPr sz="2000" b="0">
+                          <a:solidFill>
+                            <a:srgbClr val="1F2A44"/>
+                          </a:solidFill>
+                          <a:latin typeface="Nunito Sans"/>
+                        </a:rPr>
+                        <a:t>Las personas extranjeras, por ser de fuera</a:t>
+                      </a:r>
+                    </a:p>
+                  </a:txBody>
+                  <a:tcPr>
+                    <a:solidFill>
+                      <a:srgbClr val="FFFFFF"/>
+                    </a:solidFill>
+                  </a:tcPr>
+                </a:tc>
+              </a:tr>
+              <a:tr h="600000">
+                <a:tc>
+                  <a:txBody>
+                    <a:bodyPr/>
+                    <a:lstStyle/>
+                    <a:p>
+                      <a:r>
+                        <a:rPr sz="2000" b="1">
+                          <a:solidFill>
+                            <a:srgbClr val="1F2A44"/>
+                          </a:solidFill>
+                          <a:latin typeface="Nunito Sans"/>
+                        </a:rPr>
+                        <a:t>Racismo</a:t>
+                      </a:r>
+                    </a:p>
+                  </a:txBody>
+                  <a:tcPr>
+                    <a:solidFill>
+                      <a:srgbClr val="EAF0F7"/>
+                    </a:solidFill>
+                  </a:tcPr>
+                </a:tc>
+                <a:tc>
+                  <a:txBody>
+                    <a:bodyPr/>
+                    <a:lstStyle/>
+                    <a:p>
+                      <a:r>
+                        <a:rPr sz="2000" b="0">
+                          <a:solidFill>
+                            <a:srgbClr val="1F2A44"/>
+                          </a:solidFill>
+                          <a:latin typeface="Nunito Sans"/>
+                        </a:rPr>
+                        <a:t>Personas por su origen o su color de piel</a:t>
+                      </a:r>
+                    </a:p>
+                  </a:txBody>
+                  <a:tcPr>
+                    <a:solidFill>
+                      <a:srgbClr val="EAF0F7"/>
+                    </a:solidFill>
+                  </a:tcPr>
+                </a:tc>
+              </a:tr>
+              <a:tr h="600000">
+                <a:tc>
+                  <a:txBody>
+                    <a:bodyPr/>
+                    <a:lstStyle/>
+                    <a:p>
+                      <a:r>
+                        <a:rPr sz="2000" b="1">
+                          <a:solidFill>
+                            <a:srgbClr val="1F2A44"/>
+                          </a:solidFill>
+                          <a:latin typeface="Nunito Sans"/>
+                        </a:rPr>
+                        <a:t>Homofobia</a:t>
+                      </a:r>
+                    </a:p>
+                  </a:txBody>
+                  <a:tcPr>
+                    <a:solidFill>
+                      <a:srgbClr val="FFFFFF"/>
+                    </a:solidFill>
+                  </a:tcPr>
+                </a:tc>
+                <a:tc>
+                  <a:txBody>
+                    <a:bodyPr/>
+                    <a:lstStyle/>
+                    <a:p>
+                      <a:r>
+                        <a:rPr sz="2000" b="0">
+                          <a:solidFill>
+                            <a:srgbClr val="1F2A44"/>
+                          </a:solidFill>
+                          <a:latin typeface="Nunito Sans"/>
+                        </a:rPr>
+                        <a:t>Las personas homosexuales: gais y lesbianas</a:t>
+                      </a:r>
+                    </a:p>
+                  </a:txBody>
+                  <a:tcPr>
+                    <a:solidFill>
+                      <a:srgbClr val="FFFFFF"/>
+                    </a:solidFill>
+                  </a:tcPr>
+                </a:tc>
+              </a:tr>
+              <a:tr h="600000">
+                <a:tc>
+                  <a:txBody>
+                    <a:bodyPr/>
+                    <a:lstStyle/>
+                    <a:p>
+                      <a:r>
+                        <a:rPr sz="2000" b="1">
+                          <a:solidFill>
+                            <a:srgbClr val="1F2A44"/>
+                          </a:solidFill>
+                          <a:latin typeface="Nunito Sans"/>
+                        </a:rPr>
+                        <a:t>Transfobia</a:t>
+                      </a:r>
+                    </a:p>
+                  </a:txBody>
+                  <a:tcPr>
+                    <a:solidFill>
+                      <a:srgbClr val="EAF0F7"/>
+                    </a:solidFill>
+                  </a:tcPr>
+                </a:tc>
+                <a:tc>
+                  <a:txBody>
+                    <a:bodyPr/>
+                    <a:lstStyle/>
+                    <a:p>
+                      <a:r>
+                        <a:rPr sz="2000" b="0">
+                          <a:solidFill>
+                            <a:srgbClr val="1F2A44"/>
+                          </a:solidFill>
+                          <a:latin typeface="Nunito Sans"/>
+                        </a:rPr>
+                        <a:t>Las personas trans, por su identidad de género</a:t>
+                      </a:r>
+                    </a:p>
+                  </a:txBody>
+                  <a:tcPr>
+                    <a:solidFill>
+                      <a:srgbClr val="EAF0F7"/>
+                    </a:solidFill>
+                  </a:tcPr>
+                </a:tc>
+              </a:tr>
+            </a:tbl>
+          </a:graphicData>
+        </a:graphic>
+      </p:graphicFrame>
     </p:spTree>
   </p:cSld>
   <p:clrMapOvr>
